--- a/Docs/除錯_例外處理.pptx
+++ b/Docs/除錯_例外處理.pptx
@@ -5,7 +5,7 @@
     <p:sldMasterId id="2147483648" r:id="rId1"/>
   </p:sldMasterIdLst>
   <p:notesMasterIdLst>
-    <p:notesMasterId r:id="rId18"/>
+    <p:notesMasterId r:id="rId28"/>
   </p:notesMasterIdLst>
   <p:sldIdLst>
     <p:sldId id="271" r:id="rId2"/>
@@ -23,7 +23,17 @@
     <p:sldId id="279" r:id="rId14"/>
     <p:sldId id="285" r:id="rId15"/>
     <p:sldId id="284" r:id="rId16"/>
-    <p:sldId id="273" r:id="rId17"/>
+    <p:sldId id="287" r:id="rId17"/>
+    <p:sldId id="288" r:id="rId18"/>
+    <p:sldId id="289" r:id="rId19"/>
+    <p:sldId id="290" r:id="rId20"/>
+    <p:sldId id="291" r:id="rId21"/>
+    <p:sldId id="293" r:id="rId22"/>
+    <p:sldId id="294" r:id="rId23"/>
+    <p:sldId id="292" r:id="rId24"/>
+    <p:sldId id="296" r:id="rId25"/>
+    <p:sldId id="295" r:id="rId26"/>
+    <p:sldId id="273" r:id="rId27"/>
   </p:sldIdLst>
   <p:sldSz cx="12192000" cy="6858000"/>
   <p:notesSz cx="6858000" cy="9144000"/>
@@ -212,7 +222,7 @@
           <a:p>
             <a:fld id="{393B0715-2E07-4B30-82A4-29BE9219FCBD}" type="datetimeFigureOut">
               <a:rPr lang="zh-TW" altLang="en-US" smtClean="0"/>
-              <a:t>2024/12/24</a:t>
+              <a:t>2026/6/8</a:t>
             </a:fld>
             <a:endParaRPr lang="zh-TW" altLang="en-US"/>
           </a:p>
@@ -665,6 +675,762 @@
 </p:notes>
 </file>
 
+<file path=ppt/notesSlides/notesSlide10.xml><?xml version="1.0" encoding="utf-8"?>
+<p:notes xmlns:a="http://schemas.openxmlformats.org/drawingml/2006/main" xmlns:r="http://schemas.openxmlformats.org/officeDocument/2006/relationships" xmlns:p="http://schemas.openxmlformats.org/presentationml/2006/main">
+  <p:cSld>
+    <p:spTree>
+      <p:nvGrpSpPr>
+        <p:cNvPr id="1" name=""/>
+        <p:cNvGrpSpPr/>
+        <p:nvPr/>
+      </p:nvGrpSpPr>
+      <p:grpSpPr>
+        <a:xfrm>
+          <a:off x="0" y="0"/>
+          <a:ext cx="0" cy="0"/>
+          <a:chOff x="0" y="0"/>
+          <a:chExt cx="0" cy="0"/>
+        </a:xfrm>
+      </p:grpSpPr>
+      <p:sp>
+        <p:nvSpPr>
+          <p:cNvPr id="2" name="投影片影像版面配置區 1"/>
+          <p:cNvSpPr>
+            <a:spLocks noGrp="1" noRot="1" noChangeAspect="1"/>
+          </p:cNvSpPr>
+          <p:nvPr>
+            <p:ph type="sldImg"/>
+          </p:nvPr>
+        </p:nvSpPr>
+        <p:spPr/>
+      </p:sp>
+      <p:sp>
+        <p:nvSpPr>
+          <p:cNvPr id="3" name="備忘稿版面配置區 2"/>
+          <p:cNvSpPr>
+            <a:spLocks noGrp="1"/>
+          </p:cNvSpPr>
+          <p:nvPr>
+            <p:ph type="body" idx="1"/>
+          </p:nvPr>
+        </p:nvSpPr>
+        <p:spPr/>
+        <p:txBody>
+          <a:bodyPr/>
+          <a:lstStyle/>
+          <a:p>
+            <a:endParaRPr lang="zh-TW" altLang="en-US" dirty="0"/>
+          </a:p>
+        </p:txBody>
+      </p:sp>
+      <p:sp>
+        <p:nvSpPr>
+          <p:cNvPr id="4" name="投影片編號版面配置區 3"/>
+          <p:cNvSpPr>
+            <a:spLocks noGrp="1"/>
+          </p:cNvSpPr>
+          <p:nvPr>
+            <p:ph type="sldNum" sz="quarter" idx="5"/>
+          </p:nvPr>
+        </p:nvSpPr>
+        <p:spPr/>
+        <p:txBody>
+          <a:bodyPr/>
+          <a:lstStyle/>
+          <a:p>
+            <a:fld id="{5DE9BC23-93E8-4651-9E75-C60AC50B8C12}" type="slidenum">
+              <a:rPr lang="zh-TW" altLang="en-US" smtClean="0"/>
+              <a:t>17</a:t>
+            </a:fld>
+            <a:endParaRPr lang="zh-TW" altLang="en-US"/>
+          </a:p>
+        </p:txBody>
+      </p:sp>
+    </p:spTree>
+    <p:extLst>
+      <p:ext uri="{BB962C8B-B14F-4D97-AF65-F5344CB8AC3E}">
+        <p14:creationId xmlns:p14="http://schemas.microsoft.com/office/powerpoint/2010/main" val="3757786281"/>
+      </p:ext>
+    </p:extLst>
+  </p:cSld>
+  <p:clrMapOvr>
+    <a:masterClrMapping/>
+  </p:clrMapOvr>
+</p:notes>
+</file>
+
+<file path=ppt/notesSlides/notesSlide11.xml><?xml version="1.0" encoding="utf-8"?>
+<p:notes xmlns:a="http://schemas.openxmlformats.org/drawingml/2006/main" xmlns:r="http://schemas.openxmlformats.org/officeDocument/2006/relationships" xmlns:p="http://schemas.openxmlformats.org/presentationml/2006/main">
+  <p:cSld>
+    <p:spTree>
+      <p:nvGrpSpPr>
+        <p:cNvPr id="1" name=""/>
+        <p:cNvGrpSpPr/>
+        <p:nvPr/>
+      </p:nvGrpSpPr>
+      <p:grpSpPr>
+        <a:xfrm>
+          <a:off x="0" y="0"/>
+          <a:ext cx="0" cy="0"/>
+          <a:chOff x="0" y="0"/>
+          <a:chExt cx="0" cy="0"/>
+        </a:xfrm>
+      </p:grpSpPr>
+      <p:sp>
+        <p:nvSpPr>
+          <p:cNvPr id="2" name="投影片影像版面配置區 1"/>
+          <p:cNvSpPr>
+            <a:spLocks noGrp="1" noRot="1" noChangeAspect="1"/>
+          </p:cNvSpPr>
+          <p:nvPr>
+            <p:ph type="sldImg"/>
+          </p:nvPr>
+        </p:nvSpPr>
+        <p:spPr/>
+      </p:sp>
+      <p:sp>
+        <p:nvSpPr>
+          <p:cNvPr id="3" name="備忘稿版面配置區 2"/>
+          <p:cNvSpPr>
+            <a:spLocks noGrp="1"/>
+          </p:cNvSpPr>
+          <p:nvPr>
+            <p:ph type="body" idx="1"/>
+          </p:nvPr>
+        </p:nvSpPr>
+        <p:spPr/>
+        <p:txBody>
+          <a:bodyPr/>
+          <a:lstStyle/>
+          <a:p>
+            <a:endParaRPr lang="zh-TW" altLang="en-US" dirty="0"/>
+          </a:p>
+        </p:txBody>
+      </p:sp>
+      <p:sp>
+        <p:nvSpPr>
+          <p:cNvPr id="4" name="投影片編號版面配置區 3"/>
+          <p:cNvSpPr>
+            <a:spLocks noGrp="1"/>
+          </p:cNvSpPr>
+          <p:nvPr>
+            <p:ph type="sldNum" sz="quarter" idx="5"/>
+          </p:nvPr>
+        </p:nvSpPr>
+        <p:spPr/>
+        <p:txBody>
+          <a:bodyPr/>
+          <a:lstStyle/>
+          <a:p>
+            <a:fld id="{5DE9BC23-93E8-4651-9E75-C60AC50B8C12}" type="slidenum">
+              <a:rPr lang="zh-TW" altLang="en-US" smtClean="0"/>
+              <a:t>18</a:t>
+            </a:fld>
+            <a:endParaRPr lang="zh-TW" altLang="en-US"/>
+          </a:p>
+        </p:txBody>
+      </p:sp>
+    </p:spTree>
+    <p:extLst>
+      <p:ext uri="{BB962C8B-B14F-4D97-AF65-F5344CB8AC3E}">
+        <p14:creationId xmlns:p14="http://schemas.microsoft.com/office/powerpoint/2010/main" val="4142020414"/>
+      </p:ext>
+    </p:extLst>
+  </p:cSld>
+  <p:clrMapOvr>
+    <a:masterClrMapping/>
+  </p:clrMapOvr>
+</p:notes>
+</file>
+
+<file path=ppt/notesSlides/notesSlide12.xml><?xml version="1.0" encoding="utf-8"?>
+<p:notes xmlns:a="http://schemas.openxmlformats.org/drawingml/2006/main" xmlns:r="http://schemas.openxmlformats.org/officeDocument/2006/relationships" xmlns:p="http://schemas.openxmlformats.org/presentationml/2006/main">
+  <p:cSld>
+    <p:spTree>
+      <p:nvGrpSpPr>
+        <p:cNvPr id="1" name=""/>
+        <p:cNvGrpSpPr/>
+        <p:nvPr/>
+      </p:nvGrpSpPr>
+      <p:grpSpPr>
+        <a:xfrm>
+          <a:off x="0" y="0"/>
+          <a:ext cx="0" cy="0"/>
+          <a:chOff x="0" y="0"/>
+          <a:chExt cx="0" cy="0"/>
+        </a:xfrm>
+      </p:grpSpPr>
+      <p:sp>
+        <p:nvSpPr>
+          <p:cNvPr id="2" name="投影片影像版面配置區 1"/>
+          <p:cNvSpPr>
+            <a:spLocks noGrp="1" noRot="1" noChangeAspect="1"/>
+          </p:cNvSpPr>
+          <p:nvPr>
+            <p:ph type="sldImg"/>
+          </p:nvPr>
+        </p:nvSpPr>
+        <p:spPr/>
+      </p:sp>
+      <p:sp>
+        <p:nvSpPr>
+          <p:cNvPr id="3" name="備忘稿版面配置區 2"/>
+          <p:cNvSpPr>
+            <a:spLocks noGrp="1"/>
+          </p:cNvSpPr>
+          <p:nvPr>
+            <p:ph type="body" idx="1"/>
+          </p:nvPr>
+        </p:nvSpPr>
+        <p:spPr/>
+        <p:txBody>
+          <a:bodyPr/>
+          <a:lstStyle/>
+          <a:p>
+            <a:endParaRPr lang="zh-TW" altLang="en-US" dirty="0"/>
+          </a:p>
+        </p:txBody>
+      </p:sp>
+      <p:sp>
+        <p:nvSpPr>
+          <p:cNvPr id="4" name="投影片編號版面配置區 3"/>
+          <p:cNvSpPr>
+            <a:spLocks noGrp="1"/>
+          </p:cNvSpPr>
+          <p:nvPr>
+            <p:ph type="sldNum" sz="quarter" idx="5"/>
+          </p:nvPr>
+        </p:nvSpPr>
+        <p:spPr/>
+        <p:txBody>
+          <a:bodyPr/>
+          <a:lstStyle/>
+          <a:p>
+            <a:fld id="{5DE9BC23-93E8-4651-9E75-C60AC50B8C12}" type="slidenum">
+              <a:rPr lang="zh-TW" altLang="en-US" smtClean="0"/>
+              <a:t>19</a:t>
+            </a:fld>
+            <a:endParaRPr lang="zh-TW" altLang="en-US"/>
+          </a:p>
+        </p:txBody>
+      </p:sp>
+    </p:spTree>
+    <p:extLst>
+      <p:ext uri="{BB962C8B-B14F-4D97-AF65-F5344CB8AC3E}">
+        <p14:creationId xmlns:p14="http://schemas.microsoft.com/office/powerpoint/2010/main" val="4144481525"/>
+      </p:ext>
+    </p:extLst>
+  </p:cSld>
+  <p:clrMapOvr>
+    <a:masterClrMapping/>
+  </p:clrMapOvr>
+</p:notes>
+</file>
+
+<file path=ppt/notesSlides/notesSlide13.xml><?xml version="1.0" encoding="utf-8"?>
+<p:notes xmlns:a="http://schemas.openxmlformats.org/drawingml/2006/main" xmlns:r="http://schemas.openxmlformats.org/officeDocument/2006/relationships" xmlns:p="http://schemas.openxmlformats.org/presentationml/2006/main">
+  <p:cSld>
+    <p:spTree>
+      <p:nvGrpSpPr>
+        <p:cNvPr id="1" name=""/>
+        <p:cNvGrpSpPr/>
+        <p:nvPr/>
+      </p:nvGrpSpPr>
+      <p:grpSpPr>
+        <a:xfrm>
+          <a:off x="0" y="0"/>
+          <a:ext cx="0" cy="0"/>
+          <a:chOff x="0" y="0"/>
+          <a:chExt cx="0" cy="0"/>
+        </a:xfrm>
+      </p:grpSpPr>
+      <p:sp>
+        <p:nvSpPr>
+          <p:cNvPr id="2" name="投影片影像版面配置區 1"/>
+          <p:cNvSpPr>
+            <a:spLocks noGrp="1" noRot="1" noChangeAspect="1"/>
+          </p:cNvSpPr>
+          <p:nvPr>
+            <p:ph type="sldImg"/>
+          </p:nvPr>
+        </p:nvSpPr>
+        <p:spPr/>
+      </p:sp>
+      <p:sp>
+        <p:nvSpPr>
+          <p:cNvPr id="3" name="備忘稿版面配置區 2"/>
+          <p:cNvSpPr>
+            <a:spLocks noGrp="1"/>
+          </p:cNvSpPr>
+          <p:nvPr>
+            <p:ph type="body" idx="1"/>
+          </p:nvPr>
+        </p:nvSpPr>
+        <p:spPr/>
+        <p:txBody>
+          <a:bodyPr/>
+          <a:lstStyle/>
+          <a:p>
+            <a:endParaRPr lang="zh-TW" altLang="en-US" dirty="0"/>
+          </a:p>
+        </p:txBody>
+      </p:sp>
+      <p:sp>
+        <p:nvSpPr>
+          <p:cNvPr id="4" name="投影片編號版面配置區 3"/>
+          <p:cNvSpPr>
+            <a:spLocks noGrp="1"/>
+          </p:cNvSpPr>
+          <p:nvPr>
+            <p:ph type="sldNum" sz="quarter" idx="5"/>
+          </p:nvPr>
+        </p:nvSpPr>
+        <p:spPr/>
+        <p:txBody>
+          <a:bodyPr/>
+          <a:lstStyle/>
+          <a:p>
+            <a:fld id="{5DE9BC23-93E8-4651-9E75-C60AC50B8C12}" type="slidenum">
+              <a:rPr lang="zh-TW" altLang="en-US" smtClean="0"/>
+              <a:t>20</a:t>
+            </a:fld>
+            <a:endParaRPr lang="zh-TW" altLang="en-US"/>
+          </a:p>
+        </p:txBody>
+      </p:sp>
+    </p:spTree>
+    <p:extLst>
+      <p:ext uri="{BB962C8B-B14F-4D97-AF65-F5344CB8AC3E}">
+        <p14:creationId xmlns:p14="http://schemas.microsoft.com/office/powerpoint/2010/main" val="1594633504"/>
+      </p:ext>
+    </p:extLst>
+  </p:cSld>
+  <p:clrMapOvr>
+    <a:masterClrMapping/>
+  </p:clrMapOvr>
+</p:notes>
+</file>
+
+<file path=ppt/notesSlides/notesSlide14.xml><?xml version="1.0" encoding="utf-8"?>
+<p:notes xmlns:a="http://schemas.openxmlformats.org/drawingml/2006/main" xmlns:r="http://schemas.openxmlformats.org/officeDocument/2006/relationships" xmlns:p="http://schemas.openxmlformats.org/presentationml/2006/main">
+  <p:cSld>
+    <p:spTree>
+      <p:nvGrpSpPr>
+        <p:cNvPr id="1" name=""/>
+        <p:cNvGrpSpPr/>
+        <p:nvPr/>
+      </p:nvGrpSpPr>
+      <p:grpSpPr>
+        <a:xfrm>
+          <a:off x="0" y="0"/>
+          <a:ext cx="0" cy="0"/>
+          <a:chOff x="0" y="0"/>
+          <a:chExt cx="0" cy="0"/>
+        </a:xfrm>
+      </p:grpSpPr>
+      <p:sp>
+        <p:nvSpPr>
+          <p:cNvPr id="2" name="投影片影像版面配置區 1"/>
+          <p:cNvSpPr>
+            <a:spLocks noGrp="1" noRot="1" noChangeAspect="1"/>
+          </p:cNvSpPr>
+          <p:nvPr>
+            <p:ph type="sldImg"/>
+          </p:nvPr>
+        </p:nvSpPr>
+        <p:spPr/>
+      </p:sp>
+      <p:sp>
+        <p:nvSpPr>
+          <p:cNvPr id="3" name="備忘稿版面配置區 2"/>
+          <p:cNvSpPr>
+            <a:spLocks noGrp="1"/>
+          </p:cNvSpPr>
+          <p:nvPr>
+            <p:ph type="body" idx="1"/>
+          </p:nvPr>
+        </p:nvSpPr>
+        <p:spPr/>
+        <p:txBody>
+          <a:bodyPr/>
+          <a:lstStyle/>
+          <a:p>
+            <a:endParaRPr lang="zh-TW" altLang="en-US" dirty="0"/>
+          </a:p>
+        </p:txBody>
+      </p:sp>
+      <p:sp>
+        <p:nvSpPr>
+          <p:cNvPr id="4" name="投影片編號版面配置區 3"/>
+          <p:cNvSpPr>
+            <a:spLocks noGrp="1"/>
+          </p:cNvSpPr>
+          <p:nvPr>
+            <p:ph type="sldNum" sz="quarter" idx="5"/>
+          </p:nvPr>
+        </p:nvSpPr>
+        <p:spPr/>
+        <p:txBody>
+          <a:bodyPr/>
+          <a:lstStyle/>
+          <a:p>
+            <a:fld id="{5DE9BC23-93E8-4651-9E75-C60AC50B8C12}" type="slidenum">
+              <a:rPr lang="zh-TW" altLang="en-US" smtClean="0"/>
+              <a:t>21</a:t>
+            </a:fld>
+            <a:endParaRPr lang="zh-TW" altLang="en-US"/>
+          </a:p>
+        </p:txBody>
+      </p:sp>
+    </p:spTree>
+    <p:extLst>
+      <p:ext uri="{BB962C8B-B14F-4D97-AF65-F5344CB8AC3E}">
+        <p14:creationId xmlns:p14="http://schemas.microsoft.com/office/powerpoint/2010/main" val="380990112"/>
+      </p:ext>
+    </p:extLst>
+  </p:cSld>
+  <p:clrMapOvr>
+    <a:masterClrMapping/>
+  </p:clrMapOvr>
+</p:notes>
+</file>
+
+<file path=ppt/notesSlides/notesSlide15.xml><?xml version="1.0" encoding="utf-8"?>
+<p:notes xmlns:a="http://schemas.openxmlformats.org/drawingml/2006/main" xmlns:r="http://schemas.openxmlformats.org/officeDocument/2006/relationships" xmlns:p="http://schemas.openxmlformats.org/presentationml/2006/main">
+  <p:cSld>
+    <p:spTree>
+      <p:nvGrpSpPr>
+        <p:cNvPr id="1" name=""/>
+        <p:cNvGrpSpPr/>
+        <p:nvPr/>
+      </p:nvGrpSpPr>
+      <p:grpSpPr>
+        <a:xfrm>
+          <a:off x="0" y="0"/>
+          <a:ext cx="0" cy="0"/>
+          <a:chOff x="0" y="0"/>
+          <a:chExt cx="0" cy="0"/>
+        </a:xfrm>
+      </p:grpSpPr>
+      <p:sp>
+        <p:nvSpPr>
+          <p:cNvPr id="2" name="投影片影像版面配置區 1"/>
+          <p:cNvSpPr>
+            <a:spLocks noGrp="1" noRot="1" noChangeAspect="1"/>
+          </p:cNvSpPr>
+          <p:nvPr>
+            <p:ph type="sldImg"/>
+          </p:nvPr>
+        </p:nvSpPr>
+        <p:spPr/>
+      </p:sp>
+      <p:sp>
+        <p:nvSpPr>
+          <p:cNvPr id="3" name="備忘稿版面配置區 2"/>
+          <p:cNvSpPr>
+            <a:spLocks noGrp="1"/>
+          </p:cNvSpPr>
+          <p:nvPr>
+            <p:ph type="body" idx="1"/>
+          </p:nvPr>
+        </p:nvSpPr>
+        <p:spPr/>
+        <p:txBody>
+          <a:bodyPr/>
+          <a:lstStyle/>
+          <a:p>
+            <a:endParaRPr lang="zh-TW" altLang="en-US" dirty="0"/>
+          </a:p>
+        </p:txBody>
+      </p:sp>
+      <p:sp>
+        <p:nvSpPr>
+          <p:cNvPr id="4" name="投影片編號版面配置區 3"/>
+          <p:cNvSpPr>
+            <a:spLocks noGrp="1"/>
+          </p:cNvSpPr>
+          <p:nvPr>
+            <p:ph type="sldNum" sz="quarter" idx="5"/>
+          </p:nvPr>
+        </p:nvSpPr>
+        <p:spPr/>
+        <p:txBody>
+          <a:bodyPr/>
+          <a:lstStyle/>
+          <a:p>
+            <a:fld id="{5DE9BC23-93E8-4651-9E75-C60AC50B8C12}" type="slidenum">
+              <a:rPr lang="zh-TW" altLang="en-US" smtClean="0"/>
+              <a:t>22</a:t>
+            </a:fld>
+            <a:endParaRPr lang="zh-TW" altLang="en-US"/>
+          </a:p>
+        </p:txBody>
+      </p:sp>
+    </p:spTree>
+    <p:extLst>
+      <p:ext uri="{BB962C8B-B14F-4D97-AF65-F5344CB8AC3E}">
+        <p14:creationId xmlns:p14="http://schemas.microsoft.com/office/powerpoint/2010/main" val="357495722"/>
+      </p:ext>
+    </p:extLst>
+  </p:cSld>
+  <p:clrMapOvr>
+    <a:masterClrMapping/>
+  </p:clrMapOvr>
+</p:notes>
+</file>
+
+<file path=ppt/notesSlides/notesSlide16.xml><?xml version="1.0" encoding="utf-8"?>
+<p:notes xmlns:a="http://schemas.openxmlformats.org/drawingml/2006/main" xmlns:r="http://schemas.openxmlformats.org/officeDocument/2006/relationships" xmlns:p="http://schemas.openxmlformats.org/presentationml/2006/main">
+  <p:cSld>
+    <p:spTree>
+      <p:nvGrpSpPr>
+        <p:cNvPr id="1" name=""/>
+        <p:cNvGrpSpPr/>
+        <p:nvPr/>
+      </p:nvGrpSpPr>
+      <p:grpSpPr>
+        <a:xfrm>
+          <a:off x="0" y="0"/>
+          <a:ext cx="0" cy="0"/>
+          <a:chOff x="0" y="0"/>
+          <a:chExt cx="0" cy="0"/>
+        </a:xfrm>
+      </p:grpSpPr>
+      <p:sp>
+        <p:nvSpPr>
+          <p:cNvPr id="2" name="投影片影像版面配置區 1"/>
+          <p:cNvSpPr>
+            <a:spLocks noGrp="1" noRot="1" noChangeAspect="1"/>
+          </p:cNvSpPr>
+          <p:nvPr>
+            <p:ph type="sldImg"/>
+          </p:nvPr>
+        </p:nvSpPr>
+        <p:spPr/>
+      </p:sp>
+      <p:sp>
+        <p:nvSpPr>
+          <p:cNvPr id="3" name="備忘稿版面配置區 2"/>
+          <p:cNvSpPr>
+            <a:spLocks noGrp="1"/>
+          </p:cNvSpPr>
+          <p:nvPr>
+            <p:ph type="body" idx="1"/>
+          </p:nvPr>
+        </p:nvSpPr>
+        <p:spPr/>
+        <p:txBody>
+          <a:bodyPr/>
+          <a:lstStyle/>
+          <a:p>
+            <a:endParaRPr lang="zh-TW" altLang="en-US" dirty="0"/>
+          </a:p>
+        </p:txBody>
+      </p:sp>
+      <p:sp>
+        <p:nvSpPr>
+          <p:cNvPr id="4" name="投影片編號版面配置區 3"/>
+          <p:cNvSpPr>
+            <a:spLocks noGrp="1"/>
+          </p:cNvSpPr>
+          <p:nvPr>
+            <p:ph type="sldNum" sz="quarter" idx="5"/>
+          </p:nvPr>
+        </p:nvSpPr>
+        <p:spPr/>
+        <p:txBody>
+          <a:bodyPr/>
+          <a:lstStyle/>
+          <a:p>
+            <a:fld id="{5DE9BC23-93E8-4651-9E75-C60AC50B8C12}" type="slidenum">
+              <a:rPr lang="zh-TW" altLang="en-US" smtClean="0"/>
+              <a:t>23</a:t>
+            </a:fld>
+            <a:endParaRPr lang="zh-TW" altLang="en-US"/>
+          </a:p>
+        </p:txBody>
+      </p:sp>
+    </p:spTree>
+    <p:extLst>
+      <p:ext uri="{BB962C8B-B14F-4D97-AF65-F5344CB8AC3E}">
+        <p14:creationId xmlns:p14="http://schemas.microsoft.com/office/powerpoint/2010/main" val="3446478087"/>
+      </p:ext>
+    </p:extLst>
+  </p:cSld>
+  <p:clrMapOvr>
+    <a:masterClrMapping/>
+  </p:clrMapOvr>
+</p:notes>
+</file>
+
+<file path=ppt/notesSlides/notesSlide17.xml><?xml version="1.0" encoding="utf-8"?>
+<p:notes xmlns:a="http://schemas.openxmlformats.org/drawingml/2006/main" xmlns:r="http://schemas.openxmlformats.org/officeDocument/2006/relationships" xmlns:p="http://schemas.openxmlformats.org/presentationml/2006/main">
+  <p:cSld>
+    <p:spTree>
+      <p:nvGrpSpPr>
+        <p:cNvPr id="1" name=""/>
+        <p:cNvGrpSpPr/>
+        <p:nvPr/>
+      </p:nvGrpSpPr>
+      <p:grpSpPr>
+        <a:xfrm>
+          <a:off x="0" y="0"/>
+          <a:ext cx="0" cy="0"/>
+          <a:chOff x="0" y="0"/>
+          <a:chExt cx="0" cy="0"/>
+        </a:xfrm>
+      </p:grpSpPr>
+      <p:sp>
+        <p:nvSpPr>
+          <p:cNvPr id="2" name="投影片影像版面配置區 1"/>
+          <p:cNvSpPr>
+            <a:spLocks noGrp="1" noRot="1" noChangeAspect="1"/>
+          </p:cNvSpPr>
+          <p:nvPr>
+            <p:ph type="sldImg"/>
+          </p:nvPr>
+        </p:nvSpPr>
+        <p:spPr/>
+      </p:sp>
+      <p:sp>
+        <p:nvSpPr>
+          <p:cNvPr id="3" name="備忘稿版面配置區 2"/>
+          <p:cNvSpPr>
+            <a:spLocks noGrp="1"/>
+          </p:cNvSpPr>
+          <p:nvPr>
+            <p:ph type="body" idx="1"/>
+          </p:nvPr>
+        </p:nvSpPr>
+        <p:spPr/>
+        <p:txBody>
+          <a:bodyPr/>
+          <a:lstStyle/>
+          <a:p>
+            <a:endParaRPr lang="zh-TW" altLang="en-US" dirty="0"/>
+          </a:p>
+        </p:txBody>
+      </p:sp>
+      <p:sp>
+        <p:nvSpPr>
+          <p:cNvPr id="4" name="投影片編號版面配置區 3"/>
+          <p:cNvSpPr>
+            <a:spLocks noGrp="1"/>
+          </p:cNvSpPr>
+          <p:nvPr>
+            <p:ph type="sldNum" sz="quarter" idx="5"/>
+          </p:nvPr>
+        </p:nvSpPr>
+        <p:spPr/>
+        <p:txBody>
+          <a:bodyPr/>
+          <a:lstStyle/>
+          <a:p>
+            <a:fld id="{5DE9BC23-93E8-4651-9E75-C60AC50B8C12}" type="slidenum">
+              <a:rPr lang="zh-TW" altLang="en-US" smtClean="0"/>
+              <a:t>24</a:t>
+            </a:fld>
+            <a:endParaRPr lang="zh-TW" altLang="en-US"/>
+          </a:p>
+        </p:txBody>
+      </p:sp>
+    </p:spTree>
+    <p:extLst>
+      <p:ext uri="{BB962C8B-B14F-4D97-AF65-F5344CB8AC3E}">
+        <p14:creationId xmlns:p14="http://schemas.microsoft.com/office/powerpoint/2010/main" val="2881812639"/>
+      </p:ext>
+    </p:extLst>
+  </p:cSld>
+  <p:clrMapOvr>
+    <a:masterClrMapping/>
+  </p:clrMapOvr>
+</p:notes>
+</file>
+
+<file path=ppt/notesSlides/notesSlide18.xml><?xml version="1.0" encoding="utf-8"?>
+<p:notes xmlns:a="http://schemas.openxmlformats.org/drawingml/2006/main" xmlns:r="http://schemas.openxmlformats.org/officeDocument/2006/relationships" xmlns:p="http://schemas.openxmlformats.org/presentationml/2006/main">
+  <p:cSld>
+    <p:spTree>
+      <p:nvGrpSpPr>
+        <p:cNvPr id="1" name=""/>
+        <p:cNvGrpSpPr/>
+        <p:nvPr/>
+      </p:nvGrpSpPr>
+      <p:grpSpPr>
+        <a:xfrm>
+          <a:off x="0" y="0"/>
+          <a:ext cx="0" cy="0"/>
+          <a:chOff x="0" y="0"/>
+          <a:chExt cx="0" cy="0"/>
+        </a:xfrm>
+      </p:grpSpPr>
+      <p:sp>
+        <p:nvSpPr>
+          <p:cNvPr id="2" name="投影片影像版面配置區 1"/>
+          <p:cNvSpPr>
+            <a:spLocks noGrp="1" noRot="1" noChangeAspect="1"/>
+          </p:cNvSpPr>
+          <p:nvPr>
+            <p:ph type="sldImg"/>
+          </p:nvPr>
+        </p:nvSpPr>
+        <p:spPr/>
+      </p:sp>
+      <p:sp>
+        <p:nvSpPr>
+          <p:cNvPr id="3" name="備忘稿版面配置區 2"/>
+          <p:cNvSpPr>
+            <a:spLocks noGrp="1"/>
+          </p:cNvSpPr>
+          <p:nvPr>
+            <p:ph type="body" idx="1"/>
+          </p:nvPr>
+        </p:nvSpPr>
+        <p:spPr/>
+        <p:txBody>
+          <a:bodyPr/>
+          <a:lstStyle/>
+          <a:p>
+            <a:endParaRPr lang="zh-TW" altLang="en-US" dirty="0"/>
+          </a:p>
+        </p:txBody>
+      </p:sp>
+      <p:sp>
+        <p:nvSpPr>
+          <p:cNvPr id="4" name="投影片編號版面配置區 3"/>
+          <p:cNvSpPr>
+            <a:spLocks noGrp="1"/>
+          </p:cNvSpPr>
+          <p:nvPr>
+            <p:ph type="sldNum" sz="quarter" idx="5"/>
+          </p:nvPr>
+        </p:nvSpPr>
+        <p:spPr/>
+        <p:txBody>
+          <a:bodyPr/>
+          <a:lstStyle/>
+          <a:p>
+            <a:fld id="{5DE9BC23-93E8-4651-9E75-C60AC50B8C12}" type="slidenum">
+              <a:rPr lang="zh-TW" altLang="en-US" smtClean="0"/>
+              <a:t>25</a:t>
+            </a:fld>
+            <a:endParaRPr lang="zh-TW" altLang="en-US"/>
+          </a:p>
+        </p:txBody>
+      </p:sp>
+    </p:spTree>
+    <p:extLst>
+      <p:ext uri="{BB962C8B-B14F-4D97-AF65-F5344CB8AC3E}">
+        <p14:creationId xmlns:p14="http://schemas.microsoft.com/office/powerpoint/2010/main" val="3146536961"/>
+      </p:ext>
+    </p:extLst>
+  </p:cSld>
+  <p:clrMapOvr>
+    <a:masterClrMapping/>
+  </p:clrMapOvr>
+</p:notes>
+</file>
+
 <file path=ppt/notesSlides/notesSlide2.xml><?xml version="1.0" encoding="utf-8"?>
 <p:notes xmlns:a="http://schemas.openxmlformats.org/drawingml/2006/main" xmlns:r="http://schemas.openxmlformats.org/officeDocument/2006/relationships" xmlns:p="http://schemas.openxmlformats.org/presentationml/2006/main">
   <p:cSld>
@@ -2235,6 +3001,90 @@
     <p:extLst>
       <p:ext uri="{BB962C8B-B14F-4D97-AF65-F5344CB8AC3E}">
         <p14:creationId xmlns:p14="http://schemas.microsoft.com/office/powerpoint/2010/main" val="2348024266"/>
+      </p:ext>
+    </p:extLst>
+  </p:cSld>
+  <p:clrMapOvr>
+    <a:masterClrMapping/>
+  </p:clrMapOvr>
+</p:notes>
+</file>
+
+<file path=ppt/notesSlides/notesSlide9.xml><?xml version="1.0" encoding="utf-8"?>
+<p:notes xmlns:a="http://schemas.openxmlformats.org/drawingml/2006/main" xmlns:r="http://schemas.openxmlformats.org/officeDocument/2006/relationships" xmlns:p="http://schemas.openxmlformats.org/presentationml/2006/main">
+  <p:cSld>
+    <p:spTree>
+      <p:nvGrpSpPr>
+        <p:cNvPr id="1" name=""/>
+        <p:cNvGrpSpPr/>
+        <p:nvPr/>
+      </p:nvGrpSpPr>
+      <p:grpSpPr>
+        <a:xfrm>
+          <a:off x="0" y="0"/>
+          <a:ext cx="0" cy="0"/>
+          <a:chOff x="0" y="0"/>
+          <a:chExt cx="0" cy="0"/>
+        </a:xfrm>
+      </p:grpSpPr>
+      <p:sp>
+        <p:nvSpPr>
+          <p:cNvPr id="2" name="投影片影像版面配置區 1"/>
+          <p:cNvSpPr>
+            <a:spLocks noGrp="1" noRot="1" noChangeAspect="1"/>
+          </p:cNvSpPr>
+          <p:nvPr>
+            <p:ph type="sldImg"/>
+          </p:nvPr>
+        </p:nvSpPr>
+        <p:spPr/>
+      </p:sp>
+      <p:sp>
+        <p:nvSpPr>
+          <p:cNvPr id="3" name="備忘稿版面配置區 2"/>
+          <p:cNvSpPr>
+            <a:spLocks noGrp="1"/>
+          </p:cNvSpPr>
+          <p:nvPr>
+            <p:ph type="body" idx="1"/>
+          </p:nvPr>
+        </p:nvSpPr>
+        <p:spPr/>
+        <p:txBody>
+          <a:bodyPr/>
+          <a:lstStyle/>
+          <a:p>
+            <a:endParaRPr lang="zh-TW" altLang="en-US" dirty="0"/>
+          </a:p>
+        </p:txBody>
+      </p:sp>
+      <p:sp>
+        <p:nvSpPr>
+          <p:cNvPr id="4" name="投影片編號版面配置區 3"/>
+          <p:cNvSpPr>
+            <a:spLocks noGrp="1"/>
+          </p:cNvSpPr>
+          <p:nvPr>
+            <p:ph type="sldNum" sz="quarter" idx="5"/>
+          </p:nvPr>
+        </p:nvSpPr>
+        <p:spPr/>
+        <p:txBody>
+          <a:bodyPr/>
+          <a:lstStyle/>
+          <a:p>
+            <a:fld id="{5DE9BC23-93E8-4651-9E75-C60AC50B8C12}" type="slidenum">
+              <a:rPr lang="zh-TW" altLang="en-US" smtClean="0"/>
+              <a:t>16</a:t>
+            </a:fld>
+            <a:endParaRPr lang="zh-TW" altLang="en-US"/>
+          </a:p>
+        </p:txBody>
+      </p:sp>
+    </p:spTree>
+    <p:extLst>
+      <p:ext uri="{BB962C8B-B14F-4D97-AF65-F5344CB8AC3E}">
+        <p14:creationId xmlns:p14="http://schemas.microsoft.com/office/powerpoint/2010/main" val="2759838072"/>
       </p:ext>
     </p:extLst>
   </p:cSld>
@@ -2392,7 +3242,7 @@
           <a:p>
             <a:fld id="{0C4C5BAE-20C2-4C6C-8BB7-EC9F33B0AF1D}" type="datetime1">
               <a:rPr lang="en-US" altLang="zh-TW" smtClean="0"/>
-              <a:t>12/24/2024</a:t>
+              <a:t>6/8/2026</a:t>
             </a:fld>
             <a:endParaRPr lang="en-US"/>
           </a:p>
@@ -2651,7 +3501,7 @@
           <a:p>
             <a:fld id="{67CC06D4-EECC-48A2-AF3F-9A59457EBDA4}" type="datetime1">
               <a:rPr lang="zh-TW" altLang="en-US" smtClean="0"/>
-              <a:t>2024/12/24</a:t>
+              <a:t>2026/6/8</a:t>
             </a:fld>
             <a:endParaRPr lang="zh-TW" altLang="en-US"/>
           </a:p>
@@ -2854,7 +3704,7 @@
           <a:p>
             <a:fld id="{A284A9CC-476D-4542-A265-A60408C0B38B}" type="datetime1">
               <a:rPr lang="zh-TW" altLang="en-US" smtClean="0"/>
-              <a:t>2024/12/24</a:t>
+              <a:t>2026/6/8</a:t>
             </a:fld>
             <a:endParaRPr lang="zh-TW" altLang="en-US"/>
           </a:p>
@@ -3670,7 +4520,7 @@
           <a:p>
             <a:fld id="{916B6C9C-812A-4C2F-BBAA-292E88821814}" type="datetime1">
               <a:rPr lang="zh-TW" altLang="en-US" smtClean="0"/>
-              <a:t>2024/12/24</a:t>
+              <a:t>2026/6/8</a:t>
             </a:fld>
             <a:endParaRPr lang="zh-TW" altLang="en-US"/>
           </a:p>
@@ -4070,7 +4920,7 @@
           <a:p>
             <a:fld id="{16691EA5-A7B5-4A3E-A49E-5A8210A61ECA}" type="datetime1">
               <a:rPr lang="zh-TW" altLang="en-US" smtClean="0"/>
-              <a:t>2024/12/24</a:t>
+              <a:t>2026/6/8</a:t>
             </a:fld>
             <a:endParaRPr lang="zh-TW" altLang="en-US"/>
           </a:p>
@@ -4216,7 +5066,7 @@
           <a:p>
             <a:fld id="{6F761969-3F0E-4945-9991-D6250D7048A7}" type="datetime1">
               <a:rPr lang="zh-TW" altLang="en-US" smtClean="0"/>
-              <a:t>2024/12/24</a:t>
+              <a:t>2026/6/8</a:t>
             </a:fld>
             <a:endParaRPr lang="zh-TW" altLang="en-US"/>
           </a:p>
@@ -4362,7 +5212,7 @@
           <a:p>
             <a:fld id="{CAAEEA88-AD01-49FD-B830-8831011DC877}" type="datetime1">
               <a:rPr lang="zh-TW" altLang="en-US" smtClean="0"/>
-              <a:t>2024/12/24</a:t>
+              <a:t>2026/6/8</a:t>
             </a:fld>
             <a:endParaRPr lang="zh-TW" altLang="en-US"/>
           </a:p>
@@ -4910,7 +5760,7 @@
           <a:p>
             <a:fld id="{87174770-FC09-4EA3-B56C-15A0D691CABC}" type="datetime1">
               <a:rPr lang="zh-TW" altLang="en-US" smtClean="0"/>
-              <a:t>2024/12/24</a:t>
+              <a:t>2026/6/8</a:t>
             </a:fld>
             <a:endParaRPr lang="zh-TW" altLang="en-US"/>
           </a:p>
@@ -5190,7 +6040,7 @@
           <a:p>
             <a:fld id="{63804746-04D4-457F-ACCF-0A8A7BAEE87D}" type="datetime1">
               <a:rPr lang="zh-TW" altLang="en-US" smtClean="0"/>
-              <a:t>2024/12/24</a:t>
+              <a:t>2026/6/8</a:t>
             </a:fld>
             <a:endParaRPr lang="zh-TW" altLang="en-US"/>
           </a:p>
@@ -5388,7 +6238,7 @@
           <a:p>
             <a:fld id="{0DC30BCA-8991-4389-9DAD-37DCE683428C}" type="datetime1">
               <a:rPr lang="zh-TW" altLang="en-US" smtClean="0"/>
-              <a:t>2024/12/24</a:t>
+              <a:t>2026/6/8</a:t>
             </a:fld>
             <a:endParaRPr lang="en-US" dirty="0"/>
           </a:p>
@@ -7814,7 +8664,148 @@
           <a:bodyPr/>
           <a:lstStyle/>
           <a:p>
-            <a:endParaRPr lang="zh-TW" altLang="en-US" dirty="0"/>
+            <a:r>
+              <a:rPr lang="en-US" altLang="zh-TW" dirty="0"/>
+              <a:t>Java </a:t>
+            </a:r>
+            <a:r>
+              <a:rPr lang="zh-TW" altLang="en-US" dirty="0"/>
+              <a:t>交易控制（</a:t>
+            </a:r>
+            <a:r>
+              <a:rPr lang="en-US" altLang="zh-TW" dirty="0"/>
+              <a:t>Transaction Control</a:t>
+            </a:r>
+            <a:r>
+              <a:rPr lang="zh-TW" altLang="en-US" dirty="0"/>
+              <a:t>）是確保多個資料庫操作「要麼全部成功，要麼全部失敗」的核心機制，主要用於維持資料的一致性與完整性。在 </a:t>
+            </a:r>
+            <a:r>
+              <a:rPr lang="en-US" altLang="zh-TW" dirty="0"/>
+              <a:t>Java </a:t>
+            </a:r>
+            <a:r>
+              <a:rPr lang="zh-TW" altLang="en-US" dirty="0"/>
+              <a:t>中，可透過底層的 </a:t>
+            </a:r>
+            <a:r>
+              <a:rPr lang="en-US" altLang="zh-TW" b="1" dirty="0"/>
+              <a:t>JDBC</a:t>
+            </a:r>
+            <a:r>
+              <a:rPr lang="zh-TW" altLang="en-US" dirty="0"/>
+              <a:t> 或廣泛使用的 </a:t>
+            </a:r>
+            <a:r>
+              <a:rPr lang="en-US" altLang="zh-TW" b="1" dirty="0"/>
+              <a:t>Spring </a:t>
+            </a:r>
+            <a:r>
+              <a:rPr lang="zh-TW" altLang="en-US" b="1" dirty="0"/>
+              <a:t>框架</a:t>
+            </a:r>
+            <a:r>
+              <a:rPr lang="zh-TW" altLang="en-US" dirty="0"/>
+              <a:t> 來實作，以達成 </a:t>
+            </a:r>
+            <a:r>
+              <a:rPr lang="en-US" altLang="zh-TW" dirty="0"/>
+              <a:t>ACID </a:t>
+            </a:r>
+            <a:r>
+              <a:rPr lang="zh-TW" altLang="en-US" dirty="0"/>
+              <a:t>特性</a:t>
+            </a:r>
+            <a:r>
+              <a:rPr lang="zh-TW" altLang="en-US" dirty="0" smtClean="0"/>
+              <a:t>。</a:t>
+            </a:r>
+            <a:endParaRPr lang="en-US" altLang="zh-TW" dirty="0" smtClean="0"/>
+          </a:p>
+          <a:p>
+            <a:endParaRPr lang="en-US" altLang="zh-TW" dirty="0"/>
+          </a:p>
+          <a:p>
+            <a:r>
+              <a:rPr lang="zh-TW" altLang="en-US" dirty="0" smtClean="0"/>
+              <a:t>在 </a:t>
+            </a:r>
+            <a:r>
+              <a:rPr lang="en-US" altLang="zh-TW" dirty="0"/>
+              <a:t>Java </a:t>
+            </a:r>
+            <a:r>
+              <a:rPr lang="zh-TW" altLang="en-US" dirty="0"/>
+              <a:t>中主要</a:t>
+            </a:r>
+            <a:r>
+              <a:rPr lang="zh-TW" altLang="en-US" dirty="0" smtClean="0"/>
+              <a:t>透過以下兩種方式</a:t>
+            </a:r>
+            <a:r>
+              <a:rPr lang="zh-TW" altLang="en-US" dirty="0"/>
+              <a:t>來實現</a:t>
+            </a:r>
+            <a:endParaRPr lang="en-US" altLang="zh-TW" dirty="0" smtClean="0"/>
+          </a:p>
+          <a:p>
+            <a:pPr lvl="1"/>
+            <a:r>
+              <a:rPr lang="en-US" altLang="zh-TW" b="1" dirty="0"/>
+              <a:t>JDBC </a:t>
+            </a:r>
+            <a:r>
+              <a:rPr lang="zh-TW" altLang="en-US" b="1" dirty="0"/>
+              <a:t>程式化交易管理</a:t>
+            </a:r>
+            <a:r>
+              <a:rPr lang="en-US" altLang="zh-TW" b="1" dirty="0"/>
+              <a:t>(</a:t>
+            </a:r>
+            <a:r>
+              <a:rPr lang="en-US" altLang="zh-TW" dirty="0"/>
+              <a:t>Programmatic Transaction Management</a:t>
+            </a:r>
+            <a:r>
+              <a:rPr lang="en-US" altLang="zh-TW" b="1" dirty="0"/>
+              <a:t>)</a:t>
+            </a:r>
+            <a:r>
+              <a:rPr lang="zh-TW" altLang="en-US" dirty="0"/>
+              <a:t> 。</a:t>
+            </a:r>
+          </a:p>
+          <a:p>
+            <a:pPr lvl="1"/>
+            <a:r>
+              <a:rPr lang="en-US" altLang="zh-TW" b="1" dirty="0" smtClean="0"/>
+              <a:t>Spring </a:t>
+            </a:r>
+            <a:r>
+              <a:rPr lang="zh-TW" altLang="en-US" b="1" dirty="0"/>
+              <a:t>宣告式</a:t>
+            </a:r>
+            <a:r>
+              <a:rPr lang="zh-TW" altLang="en-US" b="1" dirty="0" smtClean="0"/>
+              <a:t>交易管理</a:t>
+            </a:r>
+            <a:r>
+              <a:rPr lang="en-US" altLang="zh-TW" b="1" dirty="0" smtClean="0"/>
+              <a:t>(</a:t>
+            </a:r>
+            <a:r>
+              <a:rPr lang="en-US" altLang="zh-TW" dirty="0"/>
+              <a:t>Declarative Transaction Management</a:t>
+            </a:r>
+            <a:r>
+              <a:rPr lang="en-US" altLang="zh-TW" b="1" dirty="0" smtClean="0"/>
+              <a:t>)</a:t>
+            </a:r>
+            <a:r>
+              <a:rPr lang="zh-TW" altLang="en-US" dirty="0" smtClean="0"/>
+              <a:t> </a:t>
+            </a:r>
+            <a:endParaRPr lang="en-US" altLang="zh-TW" dirty="0" smtClean="0"/>
           </a:p>
         </p:txBody>
       </p:sp>
@@ -7834,10 +8825,9 @@
           <a:lstStyle/>
           <a:p>
             <a:r>
-              <a:rPr lang="en-US" altLang="zh-TW" dirty="0"/>
-              <a:t>Q&amp;A</a:t>
-            </a:r>
-            <a:endParaRPr lang="zh-TW" altLang="en-US" dirty="0"/>
+              <a:rPr lang="zh-TW" altLang="en-US" dirty="0"/>
+              <a:t>交易控制</a:t>
+            </a:r>
           </a:p>
         </p:txBody>
       </p:sp>
@@ -7886,10 +8876,2437 @@
       </p:transition>
     </mc:Fallback>
   </mc:AlternateContent>
+  <p:timing>
+    <p:tnLst>
+      <p:par>
+        <p:cTn id="1" dur="indefinite" restart="never" nodeType="tmRoot"/>
+      </p:par>
+    </p:tnLst>
+  </p:timing>
 </p:sld>
 </file>
 
 <file path=ppt/slides/slide16.xml><?xml version="1.0" encoding="utf-8"?>
+<p:sld xmlns:a="http://schemas.openxmlformats.org/drawingml/2006/main" xmlns:r="http://schemas.openxmlformats.org/officeDocument/2006/relationships" xmlns:p="http://schemas.openxmlformats.org/presentationml/2006/main">
+  <p:cSld>
+    <p:spTree>
+      <p:nvGrpSpPr>
+        <p:cNvPr id="1" name=""/>
+        <p:cNvGrpSpPr/>
+        <p:nvPr/>
+      </p:nvGrpSpPr>
+      <p:grpSpPr>
+        <a:xfrm>
+          <a:off x="0" y="0"/>
+          <a:ext cx="0" cy="0"/>
+          <a:chOff x="0" y="0"/>
+          <a:chExt cx="0" cy="0"/>
+        </a:xfrm>
+      </p:grpSpPr>
+      <p:sp>
+        <p:nvSpPr>
+          <p:cNvPr id="2" name="內容版面配置區 1"/>
+          <p:cNvSpPr>
+            <a:spLocks noGrp="1"/>
+          </p:cNvSpPr>
+          <p:nvPr>
+            <p:ph idx="1"/>
+          </p:nvPr>
+        </p:nvSpPr>
+        <p:spPr/>
+        <p:txBody>
+          <a:bodyPr/>
+          <a:lstStyle/>
+          <a:p>
+            <a:r>
+              <a:rPr lang="zh-TW" altLang="en-US" dirty="0"/>
+              <a:t>以下為兩種主要的 </a:t>
+            </a:r>
+            <a:r>
+              <a:rPr lang="en-US" altLang="zh-TW" dirty="0"/>
+              <a:t>Java </a:t>
+            </a:r>
+            <a:r>
+              <a:rPr lang="zh-TW" altLang="en-US" dirty="0"/>
+              <a:t>交易控制實作方式說明與</a:t>
+            </a:r>
+            <a:r>
+              <a:rPr lang="zh-TW" altLang="en-US" dirty="0" smtClean="0"/>
+              <a:t>範例</a:t>
+            </a:r>
+            <a:endParaRPr lang="en-US" altLang="zh-TW" dirty="0" smtClean="0"/>
+          </a:p>
+          <a:p>
+            <a:pPr lvl="1"/>
+            <a:r>
+              <a:rPr lang="zh-TW" altLang="en-US" dirty="0"/>
+              <a:t>程式化交易管理（</a:t>
+            </a:r>
+            <a:r>
+              <a:rPr lang="en-US" altLang="zh-TW" dirty="0"/>
+              <a:t>Programmatic Transaction Management</a:t>
+            </a:r>
+            <a:r>
+              <a:rPr lang="zh-TW" altLang="en-US" dirty="0" smtClean="0"/>
+              <a:t>）</a:t>
+            </a:r>
+            <a:endParaRPr lang="en-US" altLang="zh-TW" dirty="0" smtClean="0"/>
+          </a:p>
+          <a:p>
+            <a:pPr lvl="1"/>
+            <a:r>
+              <a:rPr lang="zh-TW" altLang="en-US" dirty="0" smtClean="0"/>
+              <a:t>宣告</a:t>
+            </a:r>
+            <a:r>
+              <a:rPr lang="zh-TW" altLang="en-US" dirty="0"/>
+              <a:t>式交易管理（</a:t>
+            </a:r>
+            <a:r>
+              <a:rPr lang="en-US" altLang="zh-TW" dirty="0"/>
+              <a:t>Declarative Transaction Management</a:t>
+            </a:r>
+            <a:r>
+              <a:rPr lang="zh-TW" altLang="en-US" dirty="0"/>
+              <a:t>）</a:t>
+            </a:r>
+          </a:p>
+        </p:txBody>
+      </p:sp>
+      <p:sp>
+        <p:nvSpPr>
+          <p:cNvPr id="3" name="標題 2"/>
+          <p:cNvSpPr>
+            <a:spLocks noGrp="1"/>
+          </p:cNvSpPr>
+          <p:nvPr>
+            <p:ph type="title"/>
+          </p:nvPr>
+        </p:nvSpPr>
+        <p:spPr/>
+        <p:txBody>
+          <a:bodyPr/>
+          <a:lstStyle/>
+          <a:p>
+            <a:r>
+              <a:rPr lang="zh-TW" altLang="en-US" dirty="0" smtClean="0"/>
+              <a:t>交易控制</a:t>
+            </a:r>
+            <a:endParaRPr lang="zh-TW" altLang="en-US" dirty="0"/>
+          </a:p>
+        </p:txBody>
+      </p:sp>
+      <p:sp>
+        <p:nvSpPr>
+          <p:cNvPr id="4" name="投影片編號版面配置區 3"/>
+          <p:cNvSpPr>
+            <a:spLocks noGrp="1"/>
+          </p:cNvSpPr>
+          <p:nvPr>
+            <p:ph type="sldNum" sz="quarter" idx="12"/>
+          </p:nvPr>
+        </p:nvSpPr>
+        <p:spPr/>
+        <p:txBody>
+          <a:bodyPr/>
+          <a:lstStyle/>
+          <a:p>
+            <a:fld id="{5F6CEA59-826A-4FB0-BF3A-D1F923F9F4E7}" type="slidenum">
+              <a:rPr lang="zh-TW" altLang="en-US" smtClean="0"/>
+              <a:t>16</a:t>
+            </a:fld>
+            <a:endParaRPr lang="zh-TW" altLang="en-US"/>
+          </a:p>
+        </p:txBody>
+      </p:sp>
+    </p:spTree>
+    <p:extLst>
+      <p:ext uri="{BB962C8B-B14F-4D97-AF65-F5344CB8AC3E}">
+        <p14:creationId xmlns:p14="http://schemas.microsoft.com/office/powerpoint/2010/main" val="814620598"/>
+      </p:ext>
+    </p:extLst>
+  </p:cSld>
+  <p:clrMapOvr>
+    <a:masterClrMapping/>
+  </p:clrMapOvr>
+  <mc:AlternateContent xmlns:mc="http://schemas.openxmlformats.org/markup-compatibility/2006" xmlns:p14="http://schemas.microsoft.com/office/powerpoint/2010/main">
+    <mc:Choice Requires="p14">
+      <p:transition spd="med" p14:dur="700">
+        <p:fade/>
+      </p:transition>
+    </mc:Choice>
+    <mc:Fallback xmlns="">
+      <p:transition spd="med">
+        <p:fade/>
+      </p:transition>
+    </mc:Fallback>
+  </mc:AlternateContent>
+  <p:timing>
+    <p:tnLst>
+      <p:par>
+        <p:cTn id="1" dur="indefinite" restart="never" nodeType="tmRoot"/>
+      </p:par>
+    </p:tnLst>
+  </p:timing>
+</p:sld>
+</file>
+
+<file path=ppt/slides/slide17.xml><?xml version="1.0" encoding="utf-8"?>
+<p:sld xmlns:a="http://schemas.openxmlformats.org/drawingml/2006/main" xmlns:r="http://schemas.openxmlformats.org/officeDocument/2006/relationships" xmlns:p="http://schemas.openxmlformats.org/presentationml/2006/main">
+  <p:cSld>
+    <p:spTree>
+      <p:nvGrpSpPr>
+        <p:cNvPr id="1" name=""/>
+        <p:cNvGrpSpPr/>
+        <p:nvPr/>
+      </p:nvGrpSpPr>
+      <p:grpSpPr>
+        <a:xfrm>
+          <a:off x="0" y="0"/>
+          <a:ext cx="0" cy="0"/>
+          <a:chOff x="0" y="0"/>
+          <a:chExt cx="0" cy="0"/>
+        </a:xfrm>
+      </p:grpSpPr>
+      <p:sp>
+        <p:nvSpPr>
+          <p:cNvPr id="2" name="內容版面配置區 1"/>
+          <p:cNvSpPr>
+            <a:spLocks noGrp="1"/>
+          </p:cNvSpPr>
+          <p:nvPr>
+            <p:ph idx="1"/>
+          </p:nvPr>
+        </p:nvSpPr>
+        <p:spPr/>
+        <p:txBody>
+          <a:bodyPr>
+            <a:normAutofit/>
+          </a:bodyPr>
+          <a:lstStyle/>
+          <a:p>
+            <a:r>
+              <a:rPr lang="zh-TW" altLang="en-US" dirty="0" smtClean="0"/>
+              <a:t>直接</a:t>
+            </a:r>
+            <a:r>
+              <a:rPr lang="zh-TW" altLang="en-US" dirty="0"/>
+              <a:t>透過撰寫程式碼來控制交易的起點與終點。這種方式最底層依賴於 </a:t>
+            </a:r>
+            <a:r>
+              <a:rPr lang="en-US" altLang="zh-TW" dirty="0"/>
+              <a:t>Java Database Connectivity (JDBC) </a:t>
+            </a:r>
+            <a:r>
+              <a:rPr lang="zh-TW" altLang="en-US" dirty="0"/>
+              <a:t>的 </a:t>
+            </a:r>
+            <a:r>
+              <a:rPr lang="en-US" altLang="zh-TW" dirty="0"/>
+              <a:t>Connection </a:t>
+            </a:r>
+            <a:r>
+              <a:rPr lang="zh-TW" altLang="en-US" dirty="0"/>
+              <a:t>物件</a:t>
+            </a:r>
+            <a:r>
+              <a:rPr lang="zh-TW" altLang="en-US" dirty="0" smtClean="0"/>
+              <a:t>。</a:t>
+            </a:r>
+            <a:endParaRPr lang="en-US" altLang="zh-TW" dirty="0" smtClean="0"/>
+          </a:p>
+          <a:p>
+            <a:endParaRPr lang="en-US" altLang="zh-TW" dirty="0" smtClean="0"/>
+          </a:p>
+          <a:p>
+            <a:r>
+              <a:rPr lang="zh-TW" altLang="en-US" dirty="0" smtClean="0"/>
+              <a:t>核心</a:t>
+            </a:r>
+            <a:r>
+              <a:rPr lang="zh-TW" altLang="en-US" dirty="0"/>
+              <a:t>步驟：</a:t>
+            </a:r>
+          </a:p>
+          <a:p>
+            <a:pPr lvl="1"/>
+            <a:r>
+              <a:rPr lang="zh-TW" altLang="en-US" dirty="0"/>
+              <a:t>關閉自動提交：將 </a:t>
+            </a:r>
+            <a:r>
+              <a:rPr lang="en-US" altLang="zh-TW" dirty="0" err="1"/>
+              <a:t>setAutoCommit</a:t>
+            </a:r>
+            <a:r>
+              <a:rPr lang="en-US" altLang="zh-TW" dirty="0"/>
+              <a:t>(false)</a:t>
+            </a:r>
+            <a:r>
+              <a:rPr lang="zh-TW" altLang="en-US" dirty="0"/>
+              <a:t>。</a:t>
+            </a:r>
+          </a:p>
+          <a:p>
+            <a:pPr lvl="1"/>
+            <a:r>
+              <a:rPr lang="zh-TW" altLang="en-US" dirty="0"/>
+              <a:t>執行業務邏輯：進行各項 </a:t>
+            </a:r>
+            <a:r>
+              <a:rPr lang="en-US" altLang="zh-TW" dirty="0"/>
+              <a:t>SQL </a:t>
+            </a:r>
+            <a:r>
+              <a:rPr lang="zh-TW" altLang="en-US" dirty="0"/>
+              <a:t>操作。</a:t>
+            </a:r>
+          </a:p>
+          <a:p>
+            <a:pPr lvl="1"/>
+            <a:r>
+              <a:rPr lang="zh-TW" altLang="en-US" dirty="0"/>
+              <a:t>提交交易：若全部成功，呼叫 </a:t>
+            </a:r>
+            <a:r>
+              <a:rPr lang="en-US" altLang="zh-TW" dirty="0"/>
+              <a:t>commit()</a:t>
+            </a:r>
+            <a:r>
+              <a:rPr lang="zh-TW" altLang="en-US" dirty="0"/>
+              <a:t>。</a:t>
+            </a:r>
+          </a:p>
+          <a:p>
+            <a:pPr lvl="1"/>
+            <a:r>
+              <a:rPr lang="zh-TW" altLang="en-US" dirty="0"/>
+              <a:t>回滾交易：若發生例外，呼叫 </a:t>
+            </a:r>
+            <a:r>
+              <a:rPr lang="en-US" altLang="zh-TW" dirty="0"/>
+              <a:t>rollback()</a:t>
+            </a:r>
+            <a:r>
+              <a:rPr lang="zh-TW" altLang="en-US" dirty="0"/>
+              <a:t>。</a:t>
+            </a:r>
+            <a:endParaRPr lang="en-US" altLang="zh-TW" dirty="0" smtClean="0"/>
+          </a:p>
+        </p:txBody>
+      </p:sp>
+      <p:sp>
+        <p:nvSpPr>
+          <p:cNvPr id="3" name="標題 2"/>
+          <p:cNvSpPr>
+            <a:spLocks noGrp="1"/>
+          </p:cNvSpPr>
+          <p:nvPr>
+            <p:ph type="title"/>
+          </p:nvPr>
+        </p:nvSpPr>
+        <p:spPr/>
+        <p:txBody>
+          <a:bodyPr>
+            <a:normAutofit/>
+          </a:bodyPr>
+          <a:lstStyle/>
+          <a:p>
+            <a:r>
+              <a:rPr lang="zh-TW" altLang="en-US" dirty="0"/>
+              <a:t>程式化交易</a:t>
+            </a:r>
+            <a:r>
+              <a:rPr lang="zh-TW" altLang="en-US" dirty="0" smtClean="0"/>
+              <a:t>管理</a:t>
+            </a:r>
+            <a:endParaRPr lang="zh-TW" altLang="en-US" dirty="0"/>
+          </a:p>
+        </p:txBody>
+      </p:sp>
+      <p:sp>
+        <p:nvSpPr>
+          <p:cNvPr id="4" name="投影片編號版面配置區 3"/>
+          <p:cNvSpPr>
+            <a:spLocks noGrp="1"/>
+          </p:cNvSpPr>
+          <p:nvPr>
+            <p:ph type="sldNum" sz="quarter" idx="12"/>
+          </p:nvPr>
+        </p:nvSpPr>
+        <p:spPr/>
+        <p:txBody>
+          <a:bodyPr/>
+          <a:lstStyle/>
+          <a:p>
+            <a:fld id="{5F6CEA59-826A-4FB0-BF3A-D1F923F9F4E7}" type="slidenum">
+              <a:rPr lang="zh-TW" altLang="en-US" smtClean="0"/>
+              <a:t>17</a:t>
+            </a:fld>
+            <a:endParaRPr lang="zh-TW" altLang="en-US"/>
+          </a:p>
+        </p:txBody>
+      </p:sp>
+    </p:spTree>
+    <p:extLst>
+      <p:ext uri="{BB962C8B-B14F-4D97-AF65-F5344CB8AC3E}">
+        <p14:creationId xmlns:p14="http://schemas.microsoft.com/office/powerpoint/2010/main" val="2286782665"/>
+      </p:ext>
+    </p:extLst>
+  </p:cSld>
+  <p:clrMapOvr>
+    <a:masterClrMapping/>
+  </p:clrMapOvr>
+  <mc:AlternateContent xmlns:mc="http://schemas.openxmlformats.org/markup-compatibility/2006" xmlns:p14="http://schemas.microsoft.com/office/powerpoint/2010/main">
+    <mc:Choice Requires="p14">
+      <p:transition spd="med" p14:dur="700">
+        <p:fade/>
+      </p:transition>
+    </mc:Choice>
+    <mc:Fallback xmlns="">
+      <p:transition spd="med">
+        <p:fade/>
+      </p:transition>
+    </mc:Fallback>
+  </mc:AlternateContent>
+  <p:timing>
+    <p:tnLst>
+      <p:par>
+        <p:cTn id="1" dur="indefinite" restart="never" nodeType="tmRoot"/>
+      </p:par>
+    </p:tnLst>
+  </p:timing>
+</p:sld>
+</file>
+
+<file path=ppt/slides/slide18.xml><?xml version="1.0" encoding="utf-8"?>
+<p:sld xmlns:a="http://schemas.openxmlformats.org/drawingml/2006/main" xmlns:r="http://schemas.openxmlformats.org/officeDocument/2006/relationships" xmlns:p="http://schemas.openxmlformats.org/presentationml/2006/main">
+  <p:cSld>
+    <p:spTree>
+      <p:nvGrpSpPr>
+        <p:cNvPr id="1" name=""/>
+        <p:cNvGrpSpPr/>
+        <p:nvPr/>
+      </p:nvGrpSpPr>
+      <p:grpSpPr>
+        <a:xfrm>
+          <a:off x="0" y="0"/>
+          <a:ext cx="0" cy="0"/>
+          <a:chOff x="0" y="0"/>
+          <a:chExt cx="0" cy="0"/>
+        </a:xfrm>
+      </p:grpSpPr>
+      <p:sp>
+        <p:nvSpPr>
+          <p:cNvPr id="2" name="內容版面配置區 1"/>
+          <p:cNvSpPr>
+            <a:spLocks noGrp="1"/>
+          </p:cNvSpPr>
+          <p:nvPr>
+            <p:ph idx="1"/>
+          </p:nvPr>
+        </p:nvSpPr>
+        <p:spPr/>
+        <p:txBody>
+          <a:bodyPr/>
+          <a:lstStyle/>
+          <a:p>
+            <a:r>
+              <a:rPr lang="zh-TW" altLang="en-US" dirty="0"/>
+              <a:t>開發者無需手動呼叫 </a:t>
+            </a:r>
+            <a:r>
+              <a:rPr lang="en-US" altLang="zh-TW" dirty="0"/>
+              <a:t>commit </a:t>
+            </a:r>
+            <a:r>
+              <a:rPr lang="zh-TW" altLang="en-US" dirty="0"/>
+              <a:t>或 </a:t>
+            </a:r>
+            <a:r>
+              <a:rPr lang="en-US" altLang="zh-TW" dirty="0"/>
+              <a:t>rollback</a:t>
+            </a:r>
+            <a:r>
+              <a:rPr lang="zh-TW" altLang="en-US" dirty="0"/>
+              <a:t>，而是透過設定檔或註解（如 </a:t>
+            </a:r>
+            <a:r>
+              <a:rPr lang="en-US" altLang="zh-TW" dirty="0"/>
+              <a:t>Spring </a:t>
+            </a:r>
+            <a:r>
+              <a:rPr lang="zh-TW" altLang="en-US" dirty="0"/>
+              <a:t>的 </a:t>
+            </a:r>
+            <a:r>
+              <a:rPr lang="en-US" altLang="zh-TW" dirty="0"/>
+              <a:t>@Transactional</a:t>
+            </a:r>
+            <a:r>
+              <a:rPr lang="zh-TW" altLang="en-US" dirty="0"/>
+              <a:t>）來宣告交易邊界。框架會使用 </a:t>
+            </a:r>
+            <a:r>
+              <a:rPr lang="en-US" altLang="zh-TW" dirty="0"/>
+              <a:t>AOP</a:t>
+            </a:r>
+            <a:r>
+              <a:rPr lang="zh-TW" altLang="en-US" dirty="0"/>
+              <a:t>（面向切面程式設計）自動在方法執行前開啟交易，並在成功時提交、失敗時回滾</a:t>
+            </a:r>
+            <a:r>
+              <a:rPr lang="zh-TW" altLang="en-US" dirty="0" smtClean="0"/>
+              <a:t>。</a:t>
+            </a:r>
+            <a:endParaRPr lang="en-US" altLang="zh-TW" dirty="0" smtClean="0"/>
+          </a:p>
+          <a:p>
+            <a:endParaRPr lang="en-US" altLang="zh-TW" dirty="0"/>
+          </a:p>
+          <a:p>
+            <a:r>
+              <a:rPr lang="zh-TW" altLang="en-US" dirty="0"/>
+              <a:t>核心優勢</a:t>
+            </a:r>
+            <a:r>
+              <a:rPr lang="zh-TW" altLang="en-US" dirty="0" smtClean="0"/>
+              <a:t>：</a:t>
+            </a:r>
+            <a:endParaRPr lang="en-US" altLang="zh-TW" dirty="0" smtClean="0"/>
+          </a:p>
+          <a:p>
+            <a:pPr lvl="1"/>
+            <a:r>
+              <a:rPr lang="zh-TW" altLang="en-US" dirty="0" smtClean="0"/>
+              <a:t>業務</a:t>
+            </a:r>
+            <a:r>
+              <a:rPr lang="zh-TW" altLang="en-US" dirty="0"/>
+              <a:t>邏輯與交易控制分離，程式碼乾淨易讀</a:t>
+            </a:r>
+            <a:r>
+              <a:rPr lang="zh-TW" altLang="en-US" dirty="0" smtClean="0"/>
+              <a:t>。</a:t>
+            </a:r>
+            <a:endParaRPr lang="en-US" altLang="zh-TW" dirty="0" smtClean="0"/>
+          </a:p>
+          <a:p>
+            <a:pPr lvl="1"/>
+            <a:r>
+              <a:rPr lang="zh-TW" altLang="en-US" dirty="0" smtClean="0"/>
+              <a:t>可</a:t>
+            </a:r>
+            <a:r>
+              <a:rPr lang="zh-TW" altLang="en-US" dirty="0"/>
+              <a:t>靈活設定傳播行為（</a:t>
+            </a:r>
+            <a:r>
+              <a:rPr lang="en-US" altLang="zh-TW" dirty="0"/>
+              <a:t>Propagation</a:t>
+            </a:r>
+            <a:r>
+              <a:rPr lang="zh-TW" altLang="en-US" dirty="0"/>
+              <a:t>）與隔離級別（</a:t>
+            </a:r>
+            <a:r>
+              <a:rPr lang="en-US" altLang="zh-TW" dirty="0"/>
+              <a:t>Isolation</a:t>
+            </a:r>
+            <a:r>
+              <a:rPr lang="zh-TW" altLang="en-US" dirty="0"/>
+              <a:t>）。</a:t>
+            </a:r>
+            <a:endParaRPr lang="zh-TW" altLang="en-US" dirty="0"/>
+          </a:p>
+        </p:txBody>
+      </p:sp>
+      <p:sp>
+        <p:nvSpPr>
+          <p:cNvPr id="3" name="標題 2"/>
+          <p:cNvSpPr>
+            <a:spLocks noGrp="1"/>
+          </p:cNvSpPr>
+          <p:nvPr>
+            <p:ph type="title"/>
+          </p:nvPr>
+        </p:nvSpPr>
+        <p:spPr/>
+        <p:txBody>
+          <a:bodyPr>
+            <a:normAutofit/>
+          </a:bodyPr>
+          <a:lstStyle/>
+          <a:p>
+            <a:r>
+              <a:rPr lang="zh-TW" altLang="en-US" dirty="0"/>
+              <a:t>宣告式交易</a:t>
+            </a:r>
+            <a:r>
+              <a:rPr lang="zh-TW" altLang="en-US" dirty="0" smtClean="0"/>
+              <a:t>管理</a:t>
+            </a:r>
+            <a:endParaRPr lang="zh-TW" altLang="en-US" dirty="0"/>
+          </a:p>
+        </p:txBody>
+      </p:sp>
+      <p:sp>
+        <p:nvSpPr>
+          <p:cNvPr id="4" name="投影片編號版面配置區 3"/>
+          <p:cNvSpPr>
+            <a:spLocks noGrp="1"/>
+          </p:cNvSpPr>
+          <p:nvPr>
+            <p:ph type="sldNum" sz="quarter" idx="12"/>
+          </p:nvPr>
+        </p:nvSpPr>
+        <p:spPr/>
+        <p:txBody>
+          <a:bodyPr/>
+          <a:lstStyle/>
+          <a:p>
+            <a:fld id="{5F6CEA59-826A-4FB0-BF3A-D1F923F9F4E7}" type="slidenum">
+              <a:rPr lang="zh-TW" altLang="en-US" smtClean="0"/>
+              <a:t>18</a:t>
+            </a:fld>
+            <a:endParaRPr lang="zh-TW" altLang="en-US"/>
+          </a:p>
+        </p:txBody>
+      </p:sp>
+    </p:spTree>
+    <p:extLst>
+      <p:ext uri="{BB962C8B-B14F-4D97-AF65-F5344CB8AC3E}">
+        <p14:creationId xmlns:p14="http://schemas.microsoft.com/office/powerpoint/2010/main" val="4011046073"/>
+      </p:ext>
+    </p:extLst>
+  </p:cSld>
+  <p:clrMapOvr>
+    <a:masterClrMapping/>
+  </p:clrMapOvr>
+  <mc:AlternateContent xmlns:mc="http://schemas.openxmlformats.org/markup-compatibility/2006" xmlns:p14="http://schemas.microsoft.com/office/powerpoint/2010/main">
+    <mc:Choice Requires="p14">
+      <p:transition spd="med" p14:dur="700">
+        <p:fade/>
+      </p:transition>
+    </mc:Choice>
+    <mc:Fallback xmlns="">
+      <p:transition spd="med">
+        <p:fade/>
+      </p:transition>
+    </mc:Fallback>
+  </mc:AlternateContent>
+  <p:timing>
+    <p:tnLst>
+      <p:par>
+        <p:cTn id="1" dur="indefinite" restart="never" nodeType="tmRoot"/>
+      </p:par>
+    </p:tnLst>
+  </p:timing>
+</p:sld>
+</file>
+
+<file path=ppt/slides/slide19.xml><?xml version="1.0" encoding="utf-8"?>
+<p:sld xmlns:a="http://schemas.openxmlformats.org/drawingml/2006/main" xmlns:r="http://schemas.openxmlformats.org/officeDocument/2006/relationships" xmlns:p="http://schemas.openxmlformats.org/presentationml/2006/main">
+  <p:cSld>
+    <p:spTree>
+      <p:nvGrpSpPr>
+        <p:cNvPr id="1" name=""/>
+        <p:cNvGrpSpPr/>
+        <p:nvPr/>
+      </p:nvGrpSpPr>
+      <p:grpSpPr>
+        <a:xfrm>
+          <a:off x="0" y="0"/>
+          <a:ext cx="0" cy="0"/>
+          <a:chOff x="0" y="0"/>
+          <a:chExt cx="0" cy="0"/>
+        </a:xfrm>
+      </p:grpSpPr>
+      <p:sp>
+        <p:nvSpPr>
+          <p:cNvPr id="2" name="內容版面配置區 1"/>
+          <p:cNvSpPr>
+            <a:spLocks noGrp="1"/>
+          </p:cNvSpPr>
+          <p:nvPr>
+            <p:ph idx="1"/>
+          </p:nvPr>
+        </p:nvSpPr>
+        <p:spPr/>
+        <p:txBody>
+          <a:bodyPr/>
+          <a:lstStyle/>
+          <a:p>
+            <a:r>
+              <a:rPr lang="zh-TW" altLang="en-US" b="1" dirty="0"/>
+              <a:t>方法必須是 </a:t>
+            </a:r>
+            <a:r>
+              <a:rPr lang="en-US" altLang="zh-TW" b="1" dirty="0"/>
+              <a:t>public</a:t>
+            </a:r>
+            <a:r>
+              <a:rPr lang="zh-TW" altLang="en-US" dirty="0"/>
+              <a:t>：</a:t>
+            </a:r>
+            <a:endParaRPr lang="en-US" altLang="zh-TW" dirty="0" smtClean="0"/>
+          </a:p>
+          <a:p>
+            <a:pPr lvl="1"/>
+            <a:r>
+              <a:rPr lang="zh-TW" altLang="en-US" dirty="0" smtClean="0"/>
+              <a:t>只</a:t>
+            </a:r>
+            <a:r>
+              <a:rPr lang="zh-TW" altLang="en-US" dirty="0"/>
+              <a:t>能應用於 </a:t>
+            </a:r>
+            <a:r>
+              <a:rPr lang="en-US" altLang="zh-TW" dirty="0"/>
+              <a:t>public </a:t>
+            </a:r>
+            <a:r>
+              <a:rPr lang="zh-TW" altLang="en-US" dirty="0"/>
+              <a:t>方法。這是因為 </a:t>
+            </a:r>
+            <a:r>
+              <a:rPr lang="en-US" altLang="zh-TW" dirty="0"/>
+              <a:t>Spring </a:t>
+            </a:r>
+            <a:r>
+              <a:rPr lang="zh-TW" altLang="en-US" dirty="0"/>
+              <a:t>使用代理 </a:t>
+            </a:r>
+            <a:r>
+              <a:rPr lang="en-US" altLang="zh-TW" dirty="0"/>
+              <a:t>(AOP) </a:t>
+            </a:r>
+            <a:r>
+              <a:rPr lang="zh-TW" altLang="en-US" dirty="0"/>
+              <a:t>來實現交易管理，而代理 </a:t>
+            </a:r>
+            <a:r>
+              <a:rPr lang="en-US" altLang="zh-TW" dirty="0"/>
+              <a:t>(AOP)</a:t>
+            </a:r>
+            <a:r>
+              <a:rPr lang="zh-TW" altLang="en-US" dirty="0"/>
+              <a:t>只能攔截 </a:t>
+            </a:r>
+            <a:r>
+              <a:rPr lang="en-US" altLang="zh-TW" dirty="0"/>
+              <a:t>public </a:t>
+            </a:r>
+            <a:r>
+              <a:rPr lang="zh-TW" altLang="en-US" dirty="0"/>
+              <a:t>方法的調用</a:t>
+            </a:r>
+            <a:r>
+              <a:rPr lang="zh-TW" altLang="en-US" dirty="0" smtClean="0"/>
+              <a:t>。</a:t>
+            </a:r>
+            <a:endParaRPr lang="en-US" altLang="zh-TW" dirty="0" smtClean="0"/>
+          </a:p>
+          <a:p>
+            <a:r>
+              <a:rPr lang="zh-TW" altLang="en-US" b="1" dirty="0"/>
+              <a:t>異常處理</a:t>
+            </a:r>
+            <a:r>
+              <a:rPr lang="zh-TW" altLang="en-US" dirty="0" smtClean="0"/>
+              <a:t>：</a:t>
+            </a:r>
+            <a:endParaRPr lang="en-US" altLang="zh-TW" dirty="0" smtClean="0"/>
+          </a:p>
+          <a:p>
+            <a:pPr lvl="1"/>
+            <a:r>
+              <a:rPr lang="zh-TW" altLang="en-US" dirty="0"/>
+              <a:t>默認情況下，只有遇到 </a:t>
+            </a:r>
+            <a:r>
+              <a:rPr lang="en-US" altLang="zh-TW" dirty="0" err="1"/>
+              <a:t>RuntimeException</a:t>
+            </a:r>
+            <a:r>
+              <a:rPr lang="en-US" altLang="zh-TW" dirty="0"/>
+              <a:t> </a:t>
+            </a:r>
+            <a:r>
+              <a:rPr lang="zh-TW" altLang="en-US" dirty="0"/>
+              <a:t>和 </a:t>
+            </a:r>
+            <a:r>
+              <a:rPr lang="en-US" altLang="zh-TW" dirty="0"/>
+              <a:t>Error </a:t>
+            </a:r>
+            <a:r>
+              <a:rPr lang="zh-TW" altLang="en-US" dirty="0"/>
+              <a:t>時才會觸發 </a:t>
+            </a:r>
+            <a:r>
+              <a:rPr lang="en-US" altLang="zh-TW" dirty="0"/>
+              <a:t>rollback</a:t>
+            </a:r>
+            <a:r>
+              <a:rPr lang="zh-TW" altLang="en-US" dirty="0" smtClean="0"/>
+              <a:t>。</a:t>
+            </a:r>
+            <a:endParaRPr lang="zh-TW" altLang="en-US" dirty="0"/>
+          </a:p>
+          <a:p>
+            <a:pPr lvl="1"/>
+            <a:r>
+              <a:rPr lang="zh-TW" altLang="en-US" dirty="0"/>
+              <a:t>如果你想在遇到受檢異常時也 </a:t>
+            </a:r>
+            <a:r>
+              <a:rPr lang="en-US" altLang="zh-TW" dirty="0"/>
+              <a:t>rollback </a:t>
+            </a:r>
+            <a:r>
+              <a:rPr lang="zh-TW" altLang="en-US" dirty="0"/>
+              <a:t>交易，可以使用 </a:t>
+            </a:r>
+            <a:r>
+              <a:rPr lang="en-US" altLang="zh-TW" dirty="0" err="1"/>
+              <a:t>rollbackFor</a:t>
+            </a:r>
+            <a:r>
+              <a:rPr lang="en-US" altLang="zh-TW" dirty="0"/>
+              <a:t> </a:t>
+            </a:r>
+            <a:r>
+              <a:rPr lang="zh-TW" altLang="en-US" dirty="0"/>
+              <a:t>屬性，然後指定 </a:t>
+            </a:r>
+            <a:r>
+              <a:rPr lang="en-US" altLang="zh-TW" dirty="0"/>
+              <a:t>Exception </a:t>
+            </a:r>
+            <a:r>
+              <a:rPr lang="zh-TW" altLang="en-US" dirty="0"/>
+              <a:t>類型</a:t>
+            </a:r>
+            <a:r>
+              <a:rPr lang="zh-TW" altLang="en-US" dirty="0" smtClean="0"/>
+              <a:t>。</a:t>
+            </a:r>
+            <a:endParaRPr lang="en-US" altLang="zh-TW" dirty="0" smtClean="0"/>
+          </a:p>
+          <a:p>
+            <a:r>
+              <a:rPr lang="zh-TW" altLang="en-US" b="1" dirty="0"/>
+              <a:t>部分操作 </a:t>
+            </a:r>
+            <a:r>
+              <a:rPr lang="en-US" altLang="zh-TW" b="1" dirty="0"/>
+              <a:t>rollback</a:t>
+            </a:r>
+            <a:r>
+              <a:rPr lang="zh-TW" altLang="en-US" dirty="0" smtClean="0"/>
+              <a:t>：</a:t>
+            </a:r>
+            <a:endParaRPr lang="en-US" altLang="zh-TW" dirty="0" smtClean="0"/>
+          </a:p>
+          <a:p>
+            <a:pPr lvl="1"/>
+            <a:r>
+              <a:rPr lang="zh-TW" altLang="en-US" dirty="0"/>
+              <a:t>若只想在某些特定情況下 </a:t>
+            </a:r>
+            <a:r>
+              <a:rPr lang="en-US" altLang="zh-TW" dirty="0"/>
+              <a:t>rollback</a:t>
+            </a:r>
+            <a:r>
+              <a:rPr lang="zh-TW" altLang="en-US" dirty="0"/>
+              <a:t>。</a:t>
+            </a:r>
+          </a:p>
+          <a:p>
+            <a:pPr lvl="1"/>
+            <a:r>
+              <a:rPr lang="zh-TW" altLang="en-US" dirty="0"/>
+              <a:t>這時可以使用 </a:t>
+            </a:r>
+            <a:r>
+              <a:rPr lang="en-US" altLang="zh-TW" dirty="0" err="1"/>
+              <a:t>TransactionAspectSupport</a:t>
+            </a:r>
+            <a:r>
+              <a:rPr lang="zh-TW" altLang="en-US" dirty="0"/>
+              <a:t>，採用半手動的方式，來觸發 </a:t>
+            </a:r>
+            <a:r>
+              <a:rPr lang="en-US" altLang="zh-TW" dirty="0"/>
+              <a:t>rollback</a:t>
+            </a:r>
+            <a:r>
+              <a:rPr lang="zh-TW" altLang="en-US" dirty="0"/>
+              <a:t>。</a:t>
+            </a:r>
+            <a:endParaRPr lang="zh-TW" altLang="en-US" dirty="0"/>
+          </a:p>
+        </p:txBody>
+      </p:sp>
+      <p:sp>
+        <p:nvSpPr>
+          <p:cNvPr id="3" name="標題 2"/>
+          <p:cNvSpPr>
+            <a:spLocks noGrp="1"/>
+          </p:cNvSpPr>
+          <p:nvPr>
+            <p:ph type="title"/>
+          </p:nvPr>
+        </p:nvSpPr>
+        <p:spPr/>
+        <p:txBody>
+          <a:bodyPr/>
+          <a:lstStyle/>
+          <a:p>
+            <a:r>
+              <a:rPr lang="en-US" altLang="zh-TW" dirty="0"/>
+              <a:t>@Transactional </a:t>
+            </a:r>
+            <a:r>
+              <a:rPr lang="zh-TW" altLang="en-US" dirty="0"/>
+              <a:t>的注意事項</a:t>
+            </a:r>
+          </a:p>
+        </p:txBody>
+      </p:sp>
+      <p:sp>
+        <p:nvSpPr>
+          <p:cNvPr id="4" name="投影片編號版面配置區 3"/>
+          <p:cNvSpPr>
+            <a:spLocks noGrp="1"/>
+          </p:cNvSpPr>
+          <p:nvPr>
+            <p:ph type="sldNum" sz="quarter" idx="12"/>
+          </p:nvPr>
+        </p:nvSpPr>
+        <p:spPr/>
+        <p:txBody>
+          <a:bodyPr/>
+          <a:lstStyle/>
+          <a:p>
+            <a:fld id="{5F6CEA59-826A-4FB0-BF3A-D1F923F9F4E7}" type="slidenum">
+              <a:rPr lang="zh-TW" altLang="en-US" smtClean="0"/>
+              <a:t>19</a:t>
+            </a:fld>
+            <a:endParaRPr lang="zh-TW" altLang="en-US"/>
+          </a:p>
+        </p:txBody>
+      </p:sp>
+    </p:spTree>
+    <p:extLst>
+      <p:ext uri="{BB962C8B-B14F-4D97-AF65-F5344CB8AC3E}">
+        <p14:creationId xmlns:p14="http://schemas.microsoft.com/office/powerpoint/2010/main" val="2633628816"/>
+      </p:ext>
+    </p:extLst>
+  </p:cSld>
+  <p:clrMapOvr>
+    <a:masterClrMapping/>
+  </p:clrMapOvr>
+  <mc:AlternateContent xmlns:mc="http://schemas.openxmlformats.org/markup-compatibility/2006" xmlns:p14="http://schemas.microsoft.com/office/powerpoint/2010/main">
+    <mc:Choice Requires="p14">
+      <p:transition spd="med" p14:dur="700">
+        <p:fade/>
+      </p:transition>
+    </mc:Choice>
+    <mc:Fallback xmlns="">
+      <p:transition spd="med">
+        <p:fade/>
+      </p:transition>
+    </mc:Fallback>
+  </mc:AlternateContent>
+  <p:timing>
+    <p:tnLst>
+      <p:par>
+        <p:cTn id="1" dur="indefinite" restart="never" nodeType="tmRoot"/>
+      </p:par>
+    </p:tnLst>
+  </p:timing>
+</p:sld>
+</file>
+
+<file path=ppt/slides/slide2.xml><?xml version="1.0" encoding="utf-8"?>
+<p:sld xmlns:a="http://schemas.openxmlformats.org/drawingml/2006/main" xmlns:r="http://schemas.openxmlformats.org/officeDocument/2006/relationships" xmlns:p="http://schemas.openxmlformats.org/presentationml/2006/main">
+  <p:cSld>
+    <p:spTree>
+      <p:nvGrpSpPr>
+        <p:cNvPr id="1" name=""/>
+        <p:cNvGrpSpPr/>
+        <p:nvPr/>
+      </p:nvGrpSpPr>
+      <p:grpSpPr>
+        <a:xfrm>
+          <a:off x="0" y="0"/>
+          <a:ext cx="0" cy="0"/>
+          <a:chOff x="0" y="0"/>
+          <a:chExt cx="0" cy="0"/>
+        </a:xfrm>
+      </p:grpSpPr>
+      <p:sp>
+        <p:nvSpPr>
+          <p:cNvPr id="2" name="文字版面配置區 1"/>
+          <p:cNvSpPr>
+            <a:spLocks noGrp="1"/>
+          </p:cNvSpPr>
+          <p:nvPr>
+            <p:ph type="body" idx="1"/>
+          </p:nvPr>
+        </p:nvSpPr>
+        <p:spPr/>
+        <p:txBody>
+          <a:bodyPr>
+            <a:normAutofit lnSpcReduction="10000"/>
+          </a:bodyPr>
+          <a:lstStyle/>
+          <a:p>
+            <a:endParaRPr lang="zh-TW" altLang="en-US" dirty="0"/>
+          </a:p>
+        </p:txBody>
+      </p:sp>
+      <p:sp>
+        <p:nvSpPr>
+          <p:cNvPr id="3" name="標題 2"/>
+          <p:cNvSpPr>
+            <a:spLocks noGrp="1"/>
+          </p:cNvSpPr>
+          <p:nvPr>
+            <p:ph type="title"/>
+          </p:nvPr>
+        </p:nvSpPr>
+        <p:spPr/>
+        <p:txBody>
+          <a:bodyPr>
+            <a:normAutofit fontScale="90000"/>
+          </a:bodyPr>
+          <a:lstStyle/>
+          <a:p>
+            <a:r>
+              <a:rPr lang="zh-TW" altLang="en-US" dirty="0"/>
+              <a:t>例外處理</a:t>
+            </a:r>
+          </a:p>
+        </p:txBody>
+      </p:sp>
+    </p:spTree>
+  </p:cSld>
+  <p:clrMapOvr>
+    <a:masterClrMapping/>
+  </p:clrMapOvr>
+  <mc:AlternateContent xmlns:mc="http://schemas.openxmlformats.org/markup-compatibility/2006" xmlns:p14="http://schemas.microsoft.com/office/powerpoint/2010/main">
+    <mc:Choice Requires="p14">
+      <p:transition spd="med" p14:dur="700">
+        <p:fade/>
+      </p:transition>
+    </mc:Choice>
+    <mc:Fallback xmlns="">
+      <p:transition spd="med">
+        <p:fade/>
+      </p:transition>
+    </mc:Fallback>
+  </mc:AlternateContent>
+</p:sld>
+</file>
+
+<file path=ppt/slides/slide20.xml><?xml version="1.0" encoding="utf-8"?>
+<p:sld xmlns:a="http://schemas.openxmlformats.org/drawingml/2006/main" xmlns:r="http://schemas.openxmlformats.org/officeDocument/2006/relationships" xmlns:p="http://schemas.openxmlformats.org/presentationml/2006/main">
+  <p:cSld>
+    <p:spTree>
+      <p:nvGrpSpPr>
+        <p:cNvPr id="1" name=""/>
+        <p:cNvGrpSpPr/>
+        <p:nvPr/>
+      </p:nvGrpSpPr>
+      <p:grpSpPr>
+        <a:xfrm>
+          <a:off x="0" y="0"/>
+          <a:ext cx="0" cy="0"/>
+          <a:chOff x="0" y="0"/>
+          <a:chExt cx="0" cy="0"/>
+        </a:xfrm>
+      </p:grpSpPr>
+      <p:sp>
+        <p:nvSpPr>
+          <p:cNvPr id="2" name="內容版面配置區 1"/>
+          <p:cNvSpPr>
+            <a:spLocks noGrp="1"/>
+          </p:cNvSpPr>
+          <p:nvPr>
+            <p:ph idx="1"/>
+          </p:nvPr>
+        </p:nvSpPr>
+        <p:spPr/>
+        <p:txBody>
+          <a:bodyPr>
+            <a:normAutofit/>
+          </a:bodyPr>
+          <a:lstStyle/>
+          <a:p>
+            <a:r>
+              <a:rPr lang="zh-TW" altLang="en-US" b="1" dirty="0"/>
+              <a:t>嵌套交易</a:t>
+            </a:r>
+            <a:r>
+              <a:rPr lang="zh-TW" altLang="en-US" dirty="0" smtClean="0"/>
+              <a:t>：</a:t>
+            </a:r>
+            <a:endParaRPr lang="en-US" altLang="zh-TW" dirty="0" smtClean="0"/>
+          </a:p>
+          <a:p>
+            <a:pPr lvl="1"/>
+            <a:r>
+              <a:rPr lang="zh-TW" altLang="en-US" dirty="0"/>
+              <a:t>當一個帶有 </a:t>
+            </a:r>
+            <a:r>
+              <a:rPr lang="en-US" altLang="zh-TW" dirty="0"/>
+              <a:t>@Transactional </a:t>
+            </a:r>
+            <a:r>
+              <a:rPr lang="zh-TW" altLang="en-US" dirty="0"/>
+              <a:t>的方法調用另一個帶有 </a:t>
+            </a:r>
+            <a:r>
+              <a:rPr lang="en-US" altLang="zh-TW" dirty="0"/>
+              <a:t>@Transactional </a:t>
+            </a:r>
+            <a:r>
+              <a:rPr lang="zh-TW" altLang="en-US" dirty="0"/>
+              <a:t>的方法時，默認情況下會使用同一個交易。</a:t>
+            </a:r>
+          </a:p>
+          <a:p>
+            <a:pPr lvl="1"/>
+            <a:r>
+              <a:rPr lang="zh-TW" altLang="en-US" dirty="0" smtClean="0"/>
+              <a:t>如果你想創建一個新的交易，可以使用</a:t>
+            </a:r>
+            <a:r>
+              <a:rPr lang="zh-TW" altLang="en-US" b="1" dirty="0"/>
+              <a:t>傳播</a:t>
+            </a:r>
+            <a:r>
+              <a:rPr lang="zh-TW" altLang="en-US" b="1" dirty="0" smtClean="0"/>
+              <a:t>行為</a:t>
+            </a:r>
+            <a:r>
+              <a:rPr lang="en-US" altLang="zh-TW" b="1" dirty="0" smtClean="0"/>
+              <a:t>(</a:t>
+            </a:r>
+            <a:r>
+              <a:rPr lang="en-US" altLang="zh-TW" dirty="0" smtClean="0"/>
+              <a:t>propagation)</a:t>
+            </a:r>
+            <a:r>
+              <a:rPr lang="zh-TW" altLang="en-US" dirty="0" smtClean="0"/>
+              <a:t>屬性：</a:t>
+            </a:r>
+            <a:endParaRPr lang="en-US" altLang="zh-TW" dirty="0" smtClean="0"/>
+          </a:p>
+          <a:p>
+            <a:pPr lvl="2"/>
+            <a:r>
+              <a:rPr lang="en-US" altLang="zh-TW" b="1" dirty="0"/>
+              <a:t>REQUIRED (</a:t>
+            </a:r>
+            <a:r>
+              <a:rPr lang="zh-TW" altLang="en-US" b="1" dirty="0"/>
+              <a:t>預設行為</a:t>
+            </a:r>
+            <a:r>
+              <a:rPr lang="en-US" altLang="zh-TW" b="1" dirty="0"/>
+              <a:t>)</a:t>
+            </a:r>
+          </a:p>
+          <a:p>
+            <a:pPr lvl="2"/>
+            <a:r>
+              <a:rPr lang="en-US" altLang="zh-TW" b="1" dirty="0" smtClean="0"/>
+              <a:t>REQUIRES_NEW</a:t>
+            </a:r>
+            <a:endParaRPr lang="en-US" altLang="zh-TW" dirty="0" smtClean="0"/>
+          </a:p>
+          <a:p>
+            <a:pPr lvl="1"/>
+            <a:endParaRPr lang="en-US" altLang="zh-TW" dirty="0"/>
+          </a:p>
+        </p:txBody>
+      </p:sp>
+      <p:sp>
+        <p:nvSpPr>
+          <p:cNvPr id="3" name="標題 2"/>
+          <p:cNvSpPr>
+            <a:spLocks noGrp="1"/>
+          </p:cNvSpPr>
+          <p:nvPr>
+            <p:ph type="title"/>
+          </p:nvPr>
+        </p:nvSpPr>
+        <p:spPr/>
+        <p:txBody>
+          <a:bodyPr/>
+          <a:lstStyle/>
+          <a:p>
+            <a:r>
+              <a:rPr lang="zh-TW" altLang="en-US" dirty="0" smtClean="0"/>
+              <a:t>交易控制</a:t>
+            </a:r>
+            <a:endParaRPr lang="zh-TW" altLang="en-US" dirty="0"/>
+          </a:p>
+        </p:txBody>
+      </p:sp>
+      <p:sp>
+        <p:nvSpPr>
+          <p:cNvPr id="4" name="投影片編號版面配置區 3"/>
+          <p:cNvSpPr>
+            <a:spLocks noGrp="1"/>
+          </p:cNvSpPr>
+          <p:nvPr>
+            <p:ph type="sldNum" sz="quarter" idx="12"/>
+          </p:nvPr>
+        </p:nvSpPr>
+        <p:spPr/>
+        <p:txBody>
+          <a:bodyPr/>
+          <a:lstStyle/>
+          <a:p>
+            <a:fld id="{5F6CEA59-826A-4FB0-BF3A-D1F923F9F4E7}" type="slidenum">
+              <a:rPr lang="zh-TW" altLang="en-US" smtClean="0"/>
+              <a:t>20</a:t>
+            </a:fld>
+            <a:endParaRPr lang="zh-TW" altLang="en-US"/>
+          </a:p>
+        </p:txBody>
+      </p:sp>
+    </p:spTree>
+    <p:extLst>
+      <p:ext uri="{BB962C8B-B14F-4D97-AF65-F5344CB8AC3E}">
+        <p14:creationId xmlns:p14="http://schemas.microsoft.com/office/powerpoint/2010/main" val="4280928513"/>
+      </p:ext>
+    </p:extLst>
+  </p:cSld>
+  <p:clrMapOvr>
+    <a:masterClrMapping/>
+  </p:clrMapOvr>
+  <mc:AlternateContent xmlns:mc="http://schemas.openxmlformats.org/markup-compatibility/2006" xmlns:p14="http://schemas.microsoft.com/office/powerpoint/2010/main">
+    <mc:Choice Requires="p14">
+      <p:transition spd="med" p14:dur="700">
+        <p:fade/>
+      </p:transition>
+    </mc:Choice>
+    <mc:Fallback xmlns="">
+      <p:transition spd="med">
+        <p:fade/>
+      </p:transition>
+    </mc:Fallback>
+  </mc:AlternateContent>
+  <p:timing>
+    <p:tnLst>
+      <p:par>
+        <p:cTn id="1" dur="indefinite" restart="never" nodeType="tmRoot"/>
+      </p:par>
+    </p:tnLst>
+  </p:timing>
+</p:sld>
+</file>
+
+<file path=ppt/slides/slide21.xml><?xml version="1.0" encoding="utf-8"?>
+<p:sld xmlns:a="http://schemas.openxmlformats.org/drawingml/2006/main" xmlns:r="http://schemas.openxmlformats.org/officeDocument/2006/relationships" xmlns:p="http://schemas.openxmlformats.org/presentationml/2006/main">
+  <p:cSld>
+    <p:bg>
+      <p:bgRef idx="1001">
+        <a:schemeClr val="bg1"/>
+      </p:bgRef>
+    </p:bg>
+    <p:spTree>
+      <p:nvGrpSpPr>
+        <p:cNvPr id="1" name=""/>
+        <p:cNvGrpSpPr/>
+        <p:nvPr/>
+      </p:nvGrpSpPr>
+      <p:grpSpPr>
+        <a:xfrm>
+          <a:off x="0" y="0"/>
+          <a:ext cx="0" cy="0"/>
+          <a:chOff x="0" y="0"/>
+          <a:chExt cx="0" cy="0"/>
+        </a:xfrm>
+      </p:grpSpPr>
+      <p:sp>
+        <p:nvSpPr>
+          <p:cNvPr id="2" name="內容版面配置區 1"/>
+          <p:cNvSpPr>
+            <a:spLocks noGrp="1"/>
+          </p:cNvSpPr>
+          <p:nvPr>
+            <p:ph idx="1"/>
+          </p:nvPr>
+        </p:nvSpPr>
+        <p:spPr/>
+        <p:txBody>
+          <a:bodyPr/>
+          <a:lstStyle/>
+          <a:p>
+            <a:pPr marL="228600" lvl="2">
+              <a:spcBef>
+                <a:spcPts val="1000"/>
+              </a:spcBef>
+            </a:pPr>
+            <a:r>
+              <a:rPr lang="en-US" altLang="zh-TW" sz="2800" b="1" dirty="0">
+                <a:solidFill>
+                  <a:srgbClr val="024F6C"/>
+                </a:solidFill>
+              </a:rPr>
+              <a:t>REQUIRED (</a:t>
+            </a:r>
+            <a:r>
+              <a:rPr lang="zh-TW" altLang="en-US" sz="2800" b="1" dirty="0">
+                <a:solidFill>
+                  <a:srgbClr val="024F6C"/>
+                </a:solidFill>
+              </a:rPr>
+              <a:t>預設行為</a:t>
+            </a:r>
+            <a:r>
+              <a:rPr lang="en-US" altLang="zh-TW" sz="2800" b="1" dirty="0">
+                <a:solidFill>
+                  <a:srgbClr val="024F6C"/>
+                </a:solidFill>
+              </a:rPr>
+              <a:t>)</a:t>
+            </a:r>
+          </a:p>
+          <a:p>
+            <a:pPr lvl="1"/>
+            <a:r>
+              <a:rPr lang="zh-TW" altLang="en-US" dirty="0"/>
+              <a:t>場景：</a:t>
+            </a:r>
+            <a:r>
+              <a:rPr lang="en-US" altLang="zh-TW" dirty="0"/>
+              <a:t>Service A </a:t>
+            </a:r>
+            <a:r>
+              <a:rPr lang="zh-TW" altLang="en-US" dirty="0"/>
+              <a:t>的 </a:t>
+            </a:r>
+            <a:r>
+              <a:rPr lang="en-US" altLang="zh-TW" dirty="0" err="1"/>
+              <a:t>methodA</a:t>
+            </a:r>
+            <a:r>
+              <a:rPr lang="en-US" altLang="zh-TW" dirty="0"/>
+              <a:t>() </a:t>
+            </a:r>
+            <a:r>
+              <a:rPr lang="zh-TW" altLang="en-US" dirty="0"/>
+              <a:t>呼叫 </a:t>
+            </a:r>
+            <a:r>
+              <a:rPr lang="en-US" altLang="zh-TW" dirty="0"/>
+              <a:t>Service B </a:t>
+            </a:r>
+            <a:r>
+              <a:rPr lang="zh-TW" altLang="en-US" dirty="0"/>
+              <a:t>的 </a:t>
+            </a:r>
+            <a:r>
+              <a:rPr lang="en-US" altLang="zh-TW" dirty="0" err="1"/>
+              <a:t>methodB</a:t>
+            </a:r>
+            <a:r>
+              <a:rPr lang="en-US" altLang="zh-TW" dirty="0"/>
+              <a:t>()</a:t>
+            </a:r>
+            <a:r>
+              <a:rPr lang="zh-TW" altLang="en-US" dirty="0"/>
+              <a:t>，兩者都有 </a:t>
+            </a:r>
+            <a:r>
+              <a:rPr lang="en-US" altLang="zh-TW" dirty="0"/>
+              <a:t>@Transactional(propagation = </a:t>
+            </a:r>
+            <a:r>
+              <a:rPr lang="en-US" altLang="zh-TW" dirty="0" err="1"/>
+              <a:t>Propagation.REQUIRED</a:t>
+            </a:r>
+            <a:r>
+              <a:rPr lang="en-US" altLang="zh-TW" dirty="0"/>
+              <a:t>)</a:t>
+            </a:r>
+            <a:r>
+              <a:rPr lang="zh-TW" altLang="en-US" dirty="0"/>
+              <a:t>。</a:t>
+            </a:r>
+          </a:p>
+          <a:p>
+            <a:pPr lvl="1"/>
+            <a:endParaRPr lang="en-US" altLang="zh-TW" dirty="0" smtClean="0"/>
+          </a:p>
+          <a:p>
+            <a:pPr lvl="1"/>
+            <a:r>
+              <a:rPr lang="zh-TW" altLang="en-US" dirty="0" smtClean="0"/>
+              <a:t>結果</a:t>
+            </a:r>
+            <a:r>
+              <a:rPr lang="zh-TW" altLang="en-US" dirty="0"/>
+              <a:t>：</a:t>
+            </a:r>
+            <a:r>
+              <a:rPr lang="en-US" altLang="zh-TW" dirty="0" err="1"/>
+              <a:t>methodB</a:t>
+            </a:r>
+            <a:r>
+              <a:rPr lang="en-US" altLang="zh-TW" dirty="0"/>
+              <a:t>() </a:t>
+            </a:r>
+            <a:r>
+              <a:rPr lang="zh-TW" altLang="en-US" dirty="0"/>
+              <a:t>會加入 </a:t>
+            </a:r>
+            <a:r>
+              <a:rPr lang="en-US" altLang="zh-TW" dirty="0" err="1"/>
+              <a:t>methodA</a:t>
+            </a:r>
+            <a:r>
+              <a:rPr lang="en-US" altLang="zh-TW" dirty="0"/>
+              <a:t>() </a:t>
+            </a:r>
+            <a:r>
+              <a:rPr lang="zh-TW" altLang="en-US" dirty="0"/>
+              <a:t>建立的交易中。它們是生命共同體，只要任何一方失敗，整個交易（包含 </a:t>
+            </a:r>
+            <a:r>
+              <a:rPr lang="en-US" altLang="zh-TW" dirty="0"/>
+              <a:t>A </a:t>
+            </a:r>
+            <a:r>
+              <a:rPr lang="zh-TW" altLang="en-US" dirty="0"/>
+              <a:t>和 </a:t>
+            </a:r>
+            <a:r>
+              <a:rPr lang="en-US" altLang="zh-TW" dirty="0"/>
+              <a:t>B </a:t>
+            </a:r>
+            <a:r>
+              <a:rPr lang="zh-TW" altLang="en-US" dirty="0"/>
+              <a:t>的操作）都會一起回滾 </a:t>
+            </a:r>
+            <a:r>
+              <a:rPr lang="en-US" altLang="zh-TW" dirty="0"/>
+              <a:t>(Rollback)</a:t>
+            </a:r>
+            <a:r>
+              <a:rPr lang="zh-TW" altLang="en-US" dirty="0"/>
+              <a:t>。</a:t>
+            </a:r>
+            <a:endParaRPr lang="zh-TW" altLang="en-US" dirty="0"/>
+          </a:p>
+        </p:txBody>
+      </p:sp>
+      <p:sp>
+        <p:nvSpPr>
+          <p:cNvPr id="4" name="投影片編號版面配置區 3"/>
+          <p:cNvSpPr>
+            <a:spLocks noGrp="1"/>
+          </p:cNvSpPr>
+          <p:nvPr>
+            <p:ph type="sldNum" sz="quarter" idx="12"/>
+          </p:nvPr>
+        </p:nvSpPr>
+        <p:spPr/>
+        <p:txBody>
+          <a:bodyPr/>
+          <a:lstStyle/>
+          <a:p>
+            <a:fld id="{5F6CEA59-826A-4FB0-BF3A-D1F923F9F4E7}" type="slidenum">
+              <a:rPr lang="zh-TW" altLang="en-US" smtClean="0"/>
+              <a:t>21</a:t>
+            </a:fld>
+            <a:endParaRPr lang="zh-TW" altLang="en-US"/>
+          </a:p>
+        </p:txBody>
+      </p:sp>
+      <p:sp>
+        <p:nvSpPr>
+          <p:cNvPr id="3" name="標題 2"/>
+          <p:cNvSpPr>
+            <a:spLocks noGrp="1"/>
+          </p:cNvSpPr>
+          <p:nvPr>
+            <p:ph type="title"/>
+          </p:nvPr>
+        </p:nvSpPr>
+        <p:spPr/>
+        <p:txBody>
+          <a:bodyPr/>
+          <a:lstStyle/>
+          <a:p>
+            <a:r>
+              <a:rPr lang="zh-TW" altLang="en-US" dirty="0" smtClean="0"/>
+              <a:t>交易控制</a:t>
+            </a:r>
+            <a:endParaRPr lang="zh-TW" altLang="en-US" dirty="0"/>
+          </a:p>
+        </p:txBody>
+      </p:sp>
+    </p:spTree>
+    <p:extLst>
+      <p:ext uri="{BB962C8B-B14F-4D97-AF65-F5344CB8AC3E}">
+        <p14:creationId xmlns:p14="http://schemas.microsoft.com/office/powerpoint/2010/main" val="1110837644"/>
+      </p:ext>
+    </p:extLst>
+  </p:cSld>
+  <p:clrMapOvr>
+    <a:overrideClrMapping bg1="lt1" tx1="dk1" bg2="lt2" tx2="dk2" accent1="accent1" accent2="accent2" accent3="accent3" accent4="accent4" accent5="accent5" accent6="accent6" hlink="hlink" folHlink="folHlink"/>
+  </p:clrMapOvr>
+  <mc:AlternateContent xmlns:mc="http://schemas.openxmlformats.org/markup-compatibility/2006" xmlns:p14="http://schemas.microsoft.com/office/powerpoint/2010/main">
+    <mc:Choice Requires="p14">
+      <p:transition spd="med" p14:dur="700">
+        <p:fade/>
+      </p:transition>
+    </mc:Choice>
+    <mc:Fallback xmlns="">
+      <p:transition spd="med">
+        <p:fade/>
+      </p:transition>
+    </mc:Fallback>
+  </mc:AlternateContent>
+  <p:timing>
+    <p:tnLst>
+      <p:par>
+        <p:cTn id="1" dur="indefinite" restart="never" nodeType="tmRoot"/>
+      </p:par>
+    </p:tnLst>
+  </p:timing>
+</p:sld>
+</file>
+
+<file path=ppt/slides/slide22.xml><?xml version="1.0" encoding="utf-8"?>
+<p:sld xmlns:a="http://schemas.openxmlformats.org/drawingml/2006/main" xmlns:r="http://schemas.openxmlformats.org/officeDocument/2006/relationships" xmlns:p="http://schemas.openxmlformats.org/presentationml/2006/main">
+  <p:cSld>
+    <p:bg>
+      <p:bgRef idx="1001">
+        <a:schemeClr val="bg1"/>
+      </p:bgRef>
+    </p:bg>
+    <p:spTree>
+      <p:nvGrpSpPr>
+        <p:cNvPr id="1" name=""/>
+        <p:cNvGrpSpPr/>
+        <p:nvPr/>
+      </p:nvGrpSpPr>
+      <p:grpSpPr>
+        <a:xfrm>
+          <a:off x="0" y="0"/>
+          <a:ext cx="0" cy="0"/>
+          <a:chOff x="0" y="0"/>
+          <a:chExt cx="0" cy="0"/>
+        </a:xfrm>
+      </p:grpSpPr>
+      <p:sp>
+        <p:nvSpPr>
+          <p:cNvPr id="2" name="內容版面配置區 1"/>
+          <p:cNvSpPr>
+            <a:spLocks noGrp="1"/>
+          </p:cNvSpPr>
+          <p:nvPr>
+            <p:ph idx="1"/>
+          </p:nvPr>
+        </p:nvSpPr>
+        <p:spPr/>
+        <p:txBody>
+          <a:bodyPr>
+            <a:normAutofit fontScale="92500" lnSpcReduction="20000"/>
+          </a:bodyPr>
+          <a:lstStyle/>
+          <a:p>
+            <a:r>
+              <a:rPr lang="en-US" altLang="zh-TW" b="1" dirty="0" smtClean="0"/>
+              <a:t>REQUIRES_NEW</a:t>
+            </a:r>
+          </a:p>
+          <a:p>
+            <a:pPr lvl="1"/>
+            <a:r>
+              <a:rPr lang="zh-TW" altLang="en-US" b="1" dirty="0"/>
+              <a:t>這個行為比較強勢，它的規則是：「我不管現在有沒有交易，我就是要建立一個全新的、獨立的交易。如果當前有交易，就先把它掛起。」</a:t>
+            </a:r>
+          </a:p>
+          <a:p>
+            <a:pPr lvl="1"/>
+            <a:endParaRPr lang="zh-TW" altLang="en-US" b="1" dirty="0"/>
+          </a:p>
+          <a:p>
+            <a:pPr lvl="1"/>
+            <a:r>
+              <a:rPr lang="zh-TW" altLang="en-US" b="1" dirty="0"/>
+              <a:t>場景：</a:t>
+            </a:r>
+            <a:r>
+              <a:rPr lang="en-US" altLang="zh-TW" b="1" dirty="0"/>
+              <a:t>Service A </a:t>
+            </a:r>
+            <a:r>
+              <a:rPr lang="zh-TW" altLang="en-US" b="1" dirty="0"/>
+              <a:t>的 </a:t>
+            </a:r>
+            <a:r>
+              <a:rPr lang="en-US" altLang="zh-TW" b="1" dirty="0" err="1"/>
+              <a:t>methodA</a:t>
+            </a:r>
+            <a:r>
+              <a:rPr lang="en-US" altLang="zh-TW" b="1" dirty="0"/>
+              <a:t>() </a:t>
+            </a:r>
+            <a:r>
+              <a:rPr lang="zh-TW" altLang="en-US" b="1" dirty="0"/>
+              <a:t>呼叫 </a:t>
+            </a:r>
+            <a:r>
+              <a:rPr lang="en-US" altLang="zh-TW" b="1" dirty="0"/>
+              <a:t>Service B </a:t>
+            </a:r>
+            <a:r>
+              <a:rPr lang="zh-TW" altLang="en-US" b="1" dirty="0"/>
+              <a:t>的 </a:t>
+            </a:r>
+            <a:r>
+              <a:rPr lang="en-US" altLang="zh-TW" b="1" dirty="0" err="1"/>
+              <a:t>methodB</a:t>
+            </a:r>
+            <a:r>
+              <a:rPr lang="en-US" altLang="zh-TW" b="1" dirty="0"/>
+              <a:t>()</a:t>
+            </a:r>
+            <a:r>
+              <a:rPr lang="zh-TW" altLang="en-US" b="1" dirty="0"/>
+              <a:t>，</a:t>
+            </a:r>
+            <a:r>
+              <a:rPr lang="en-US" altLang="zh-TW" b="1" dirty="0" err="1"/>
+              <a:t>methodB</a:t>
+            </a:r>
+            <a:r>
+              <a:rPr lang="en-US" altLang="zh-TW" b="1" dirty="0"/>
+              <a:t>() </a:t>
+            </a:r>
+            <a:r>
+              <a:rPr lang="zh-TW" altLang="en-US" b="1" dirty="0"/>
+              <a:t>設定了 </a:t>
+            </a:r>
+            <a:r>
+              <a:rPr lang="en-US" altLang="zh-TW" b="1" dirty="0"/>
+              <a:t>@Transactional(propagation = </a:t>
+            </a:r>
+            <a:r>
+              <a:rPr lang="en-US" altLang="zh-TW" b="1" dirty="0" err="1"/>
+              <a:t>Propagation.REQUIRES_NEW</a:t>
+            </a:r>
+            <a:r>
+              <a:rPr lang="en-US" altLang="zh-TW" b="1" dirty="0"/>
+              <a:t>)</a:t>
+            </a:r>
+            <a:r>
+              <a:rPr lang="zh-TW" altLang="en-US" b="1" dirty="0" smtClean="0"/>
+              <a:t>。</a:t>
+            </a:r>
+            <a:endParaRPr lang="en-US" altLang="zh-TW" b="1" dirty="0" smtClean="0"/>
+          </a:p>
+          <a:p>
+            <a:pPr lvl="1"/>
+            <a:endParaRPr lang="zh-TW" altLang="en-US" b="1" dirty="0"/>
+          </a:p>
+          <a:p>
+            <a:pPr lvl="1"/>
+            <a:r>
+              <a:rPr lang="zh-TW" altLang="en-US" b="1" dirty="0"/>
+              <a:t>結果：當執行到 </a:t>
+            </a:r>
+            <a:r>
+              <a:rPr lang="en-US" altLang="zh-TW" b="1" dirty="0" err="1"/>
+              <a:t>methodB</a:t>
+            </a:r>
+            <a:r>
+              <a:rPr lang="en-US" altLang="zh-TW" b="1" dirty="0"/>
+              <a:t>() </a:t>
+            </a:r>
+            <a:r>
+              <a:rPr lang="zh-TW" altLang="en-US" b="1" dirty="0"/>
+              <a:t>時，</a:t>
+            </a:r>
+            <a:r>
+              <a:rPr lang="en-US" altLang="zh-TW" b="1" dirty="0" err="1"/>
+              <a:t>methodA</a:t>
+            </a:r>
+            <a:r>
+              <a:rPr lang="en-US" altLang="zh-TW" b="1" dirty="0"/>
+              <a:t>() </a:t>
+            </a:r>
+            <a:r>
+              <a:rPr lang="zh-TW" altLang="en-US" b="1" dirty="0"/>
+              <a:t>的交易會被暫停。</a:t>
+            </a:r>
+            <a:r>
+              <a:rPr lang="en-US" altLang="zh-TW" b="1" dirty="0"/>
+              <a:t>Spring </a:t>
+            </a:r>
+            <a:r>
+              <a:rPr lang="zh-TW" altLang="en-US" b="1" dirty="0"/>
+              <a:t>會為 </a:t>
+            </a:r>
+            <a:r>
+              <a:rPr lang="en-US" altLang="zh-TW" b="1" dirty="0" err="1"/>
+              <a:t>methodB</a:t>
+            </a:r>
+            <a:r>
+              <a:rPr lang="en-US" altLang="zh-TW" b="1" dirty="0"/>
+              <a:t>() </a:t>
+            </a:r>
+            <a:r>
+              <a:rPr lang="zh-TW" altLang="en-US" b="1" dirty="0"/>
+              <a:t>開啟一個全新的交易</a:t>
+            </a:r>
+            <a:r>
+              <a:rPr lang="zh-TW" altLang="en-US" b="1" dirty="0" smtClean="0"/>
+              <a:t>。</a:t>
+            </a:r>
+            <a:endParaRPr lang="en-US" altLang="zh-TW" b="1" dirty="0" smtClean="0"/>
+          </a:p>
+          <a:p>
+            <a:pPr lvl="1"/>
+            <a:endParaRPr lang="zh-TW" altLang="en-US" b="1" dirty="0"/>
+          </a:p>
+          <a:p>
+            <a:pPr lvl="1"/>
+            <a:r>
+              <a:rPr lang="zh-TW" altLang="en-US" b="1" dirty="0"/>
+              <a:t>如果 </a:t>
+            </a:r>
+            <a:r>
+              <a:rPr lang="en-US" altLang="zh-TW" b="1" dirty="0" err="1"/>
+              <a:t>methodB</a:t>
+            </a:r>
+            <a:r>
+              <a:rPr lang="en-US" altLang="zh-TW" b="1" dirty="0"/>
+              <a:t>() </a:t>
+            </a:r>
+            <a:r>
+              <a:rPr lang="zh-TW" altLang="en-US" b="1" dirty="0"/>
+              <a:t>成功，它的交易會獨立提交</a:t>
+            </a:r>
+            <a:r>
+              <a:rPr lang="zh-TW" altLang="en-US" b="1" dirty="0" smtClean="0"/>
+              <a:t>。</a:t>
+            </a:r>
+            <a:endParaRPr lang="en-US" altLang="zh-TW" b="1" dirty="0" smtClean="0"/>
+          </a:p>
+          <a:p>
+            <a:pPr lvl="1"/>
+            <a:endParaRPr lang="zh-TW" altLang="en-US" b="1" dirty="0"/>
+          </a:p>
+          <a:p>
+            <a:pPr lvl="1"/>
+            <a:r>
+              <a:rPr lang="zh-TW" altLang="en-US" b="1" dirty="0"/>
+              <a:t>如果 </a:t>
+            </a:r>
+            <a:r>
+              <a:rPr lang="en-US" altLang="zh-TW" b="1" dirty="0" err="1"/>
+              <a:t>methodB</a:t>
+            </a:r>
+            <a:r>
+              <a:rPr lang="en-US" altLang="zh-TW" b="1" dirty="0"/>
+              <a:t>() </a:t>
+            </a:r>
+            <a:r>
+              <a:rPr lang="zh-TW" altLang="en-US" b="1" dirty="0"/>
+              <a:t>失敗，只有 </a:t>
+            </a:r>
+            <a:r>
+              <a:rPr lang="en-US" altLang="zh-TW" b="1" dirty="0" err="1"/>
+              <a:t>methodB</a:t>
+            </a:r>
+            <a:r>
+              <a:rPr lang="en-US" altLang="zh-TW" b="1" dirty="0"/>
+              <a:t>() </a:t>
+            </a:r>
+            <a:r>
+              <a:rPr lang="zh-TW" altLang="en-US" b="1" dirty="0"/>
+              <a:t>的交易會回滾 </a:t>
+            </a:r>
+            <a:r>
+              <a:rPr lang="en-US" altLang="zh-TW" b="1" dirty="0"/>
+              <a:t>(Rollback)</a:t>
+            </a:r>
+            <a:r>
+              <a:rPr lang="zh-TW" altLang="en-US" b="1" dirty="0"/>
+              <a:t>。</a:t>
+            </a:r>
+            <a:r>
+              <a:rPr lang="en-US" altLang="zh-TW" b="1" dirty="0" err="1"/>
+              <a:t>methodA</a:t>
+            </a:r>
+            <a:r>
+              <a:rPr lang="en-US" altLang="zh-TW" b="1" dirty="0"/>
+              <a:t>() </a:t>
+            </a:r>
+            <a:r>
+              <a:rPr lang="zh-TW" altLang="en-US" b="1" dirty="0"/>
+              <a:t>的交易不受影響（除非 </a:t>
+            </a:r>
+            <a:r>
+              <a:rPr lang="en-US" altLang="zh-TW" b="1" dirty="0" err="1"/>
+              <a:t>methodA</a:t>
+            </a:r>
+            <a:r>
+              <a:rPr lang="en-US" altLang="zh-TW" b="1" dirty="0"/>
+              <a:t>() </a:t>
+            </a:r>
+            <a:r>
+              <a:rPr lang="zh-TW" altLang="en-US" b="1" dirty="0"/>
+              <a:t>沒有處理 </a:t>
+            </a:r>
+            <a:r>
+              <a:rPr lang="en-US" altLang="zh-TW" b="1" dirty="0" err="1"/>
+              <a:t>methodB</a:t>
+            </a:r>
+            <a:r>
+              <a:rPr lang="en-US" altLang="zh-TW" b="1" dirty="0"/>
+              <a:t>() </a:t>
+            </a:r>
+            <a:r>
+              <a:rPr lang="zh-TW" altLang="en-US" b="1" dirty="0"/>
+              <a:t>拋出的例外，導致自己也失敗）</a:t>
+            </a:r>
+            <a:r>
+              <a:rPr lang="zh-TW" altLang="en-US" b="1" dirty="0" smtClean="0"/>
+              <a:t>。</a:t>
+            </a:r>
+            <a:endParaRPr lang="en-US" altLang="zh-TW" b="1" dirty="0" smtClean="0"/>
+          </a:p>
+          <a:p>
+            <a:pPr lvl="1"/>
+            <a:endParaRPr lang="zh-TW" altLang="en-US" b="1" dirty="0"/>
+          </a:p>
+          <a:p>
+            <a:pPr lvl="1"/>
+            <a:r>
+              <a:rPr lang="en-US" altLang="zh-TW" b="1" dirty="0" err="1"/>
+              <a:t>methodB</a:t>
+            </a:r>
+            <a:r>
+              <a:rPr lang="en-US" altLang="zh-TW" b="1" dirty="0"/>
+              <a:t>() </a:t>
+            </a:r>
+            <a:r>
+              <a:rPr lang="zh-TW" altLang="en-US" b="1" dirty="0"/>
+              <a:t>結束後，</a:t>
+            </a:r>
+            <a:r>
+              <a:rPr lang="en-US" altLang="zh-TW" b="1" dirty="0" err="1"/>
+              <a:t>methodA</a:t>
+            </a:r>
+            <a:r>
+              <a:rPr lang="en-US" altLang="zh-TW" b="1" dirty="0"/>
+              <a:t>() </a:t>
+            </a:r>
+            <a:r>
+              <a:rPr lang="zh-TW" altLang="en-US" b="1" dirty="0"/>
+              <a:t>被掛起的交易會恢復執行。</a:t>
+            </a:r>
+            <a:endParaRPr lang="en-US" altLang="zh-TW" b="1" dirty="0"/>
+          </a:p>
+        </p:txBody>
+      </p:sp>
+      <p:sp>
+        <p:nvSpPr>
+          <p:cNvPr id="4" name="投影片編號版面配置區 3"/>
+          <p:cNvSpPr>
+            <a:spLocks noGrp="1"/>
+          </p:cNvSpPr>
+          <p:nvPr>
+            <p:ph type="sldNum" sz="quarter" idx="12"/>
+          </p:nvPr>
+        </p:nvSpPr>
+        <p:spPr/>
+        <p:txBody>
+          <a:bodyPr/>
+          <a:lstStyle/>
+          <a:p>
+            <a:fld id="{5F6CEA59-826A-4FB0-BF3A-D1F923F9F4E7}" type="slidenum">
+              <a:rPr lang="zh-TW" altLang="en-US" smtClean="0"/>
+              <a:t>22</a:t>
+            </a:fld>
+            <a:endParaRPr lang="zh-TW" altLang="en-US"/>
+          </a:p>
+        </p:txBody>
+      </p:sp>
+      <p:sp>
+        <p:nvSpPr>
+          <p:cNvPr id="3" name="標題 2"/>
+          <p:cNvSpPr>
+            <a:spLocks noGrp="1"/>
+          </p:cNvSpPr>
+          <p:nvPr>
+            <p:ph type="title"/>
+          </p:nvPr>
+        </p:nvSpPr>
+        <p:spPr/>
+        <p:txBody>
+          <a:bodyPr/>
+          <a:lstStyle/>
+          <a:p>
+            <a:r>
+              <a:rPr lang="zh-TW" altLang="en-US" dirty="0" smtClean="0"/>
+              <a:t>交易控制</a:t>
+            </a:r>
+            <a:endParaRPr lang="zh-TW" altLang="en-US" dirty="0"/>
+          </a:p>
+        </p:txBody>
+      </p:sp>
+    </p:spTree>
+    <p:extLst>
+      <p:ext uri="{BB962C8B-B14F-4D97-AF65-F5344CB8AC3E}">
+        <p14:creationId xmlns:p14="http://schemas.microsoft.com/office/powerpoint/2010/main" val="21612091"/>
+      </p:ext>
+    </p:extLst>
+  </p:cSld>
+  <p:clrMapOvr>
+    <a:overrideClrMapping bg1="lt1" tx1="dk1" bg2="lt2" tx2="dk2" accent1="accent1" accent2="accent2" accent3="accent3" accent4="accent4" accent5="accent5" accent6="accent6" hlink="hlink" folHlink="folHlink"/>
+  </p:clrMapOvr>
+  <mc:AlternateContent xmlns:mc="http://schemas.openxmlformats.org/markup-compatibility/2006" xmlns:p14="http://schemas.microsoft.com/office/powerpoint/2010/main">
+    <mc:Choice Requires="p14">
+      <p:transition spd="med" p14:dur="700">
+        <p:fade/>
+      </p:transition>
+    </mc:Choice>
+    <mc:Fallback xmlns="">
+      <p:transition spd="med">
+        <p:fade/>
+      </p:transition>
+    </mc:Fallback>
+  </mc:AlternateContent>
+  <p:timing>
+    <p:tnLst>
+      <p:par>
+        <p:cTn id="1" dur="indefinite" restart="never" nodeType="tmRoot"/>
+      </p:par>
+    </p:tnLst>
+  </p:timing>
+</p:sld>
+</file>
+
+<file path=ppt/slides/slide23.xml><?xml version="1.0" encoding="utf-8"?>
+<p:sld xmlns:a="http://schemas.openxmlformats.org/drawingml/2006/main" xmlns:r="http://schemas.openxmlformats.org/officeDocument/2006/relationships" xmlns:p="http://schemas.openxmlformats.org/presentationml/2006/main">
+  <p:cSld>
+    <p:spTree>
+      <p:nvGrpSpPr>
+        <p:cNvPr id="1" name=""/>
+        <p:cNvGrpSpPr/>
+        <p:nvPr/>
+      </p:nvGrpSpPr>
+      <p:grpSpPr>
+        <a:xfrm>
+          <a:off x="0" y="0"/>
+          <a:ext cx="0" cy="0"/>
+          <a:chOff x="0" y="0"/>
+          <a:chExt cx="0" cy="0"/>
+        </a:xfrm>
+      </p:grpSpPr>
+      <p:sp>
+        <p:nvSpPr>
+          <p:cNvPr id="2" name="內容版面配置區 1"/>
+          <p:cNvSpPr>
+            <a:spLocks noGrp="1"/>
+          </p:cNvSpPr>
+          <p:nvPr>
+            <p:ph idx="1"/>
+          </p:nvPr>
+        </p:nvSpPr>
+        <p:spPr/>
+        <p:txBody>
+          <a:bodyPr/>
+          <a:lstStyle/>
+          <a:p>
+            <a:r>
+              <a:rPr lang="zh-TW" altLang="en-US" b="1" dirty="0"/>
+              <a:t>選擇合適的位置</a:t>
+            </a:r>
+            <a:r>
+              <a:rPr lang="zh-TW" altLang="en-US" dirty="0"/>
+              <a:t>：</a:t>
+            </a:r>
+            <a:endParaRPr lang="en-US" altLang="zh-TW" dirty="0"/>
+          </a:p>
+          <a:p>
+            <a:pPr lvl="1"/>
+            <a:r>
+              <a:rPr lang="zh-TW" altLang="en-US" dirty="0"/>
+              <a:t>通常建議將 </a:t>
+            </a:r>
+            <a:r>
+              <a:rPr lang="en-US" altLang="zh-TW" dirty="0"/>
+              <a:t>@Transactional </a:t>
+            </a:r>
+            <a:r>
+              <a:rPr lang="zh-TW" altLang="en-US" dirty="0"/>
+              <a:t>放在 </a:t>
+            </a:r>
+            <a:r>
+              <a:rPr lang="en-US" altLang="zh-TW" dirty="0"/>
+              <a:t>Service </a:t>
+            </a:r>
+            <a:r>
+              <a:rPr lang="zh-TW" altLang="en-US" dirty="0"/>
+              <a:t>層，而不是 </a:t>
+            </a:r>
+            <a:r>
+              <a:rPr lang="en-US" altLang="zh-TW" dirty="0"/>
+              <a:t>DAO </a:t>
+            </a:r>
+            <a:r>
+              <a:rPr lang="zh-TW" altLang="en-US" dirty="0"/>
+              <a:t>層。這樣可以更好地控制交易的邊界。</a:t>
+            </a:r>
+            <a:endParaRPr lang="en-US" altLang="zh-TW" dirty="0"/>
+          </a:p>
+          <a:p>
+            <a:pPr lvl="1"/>
+            <a:endParaRPr lang="en-US" altLang="zh-TW" dirty="0"/>
+          </a:p>
+          <a:p>
+            <a:r>
+              <a:rPr lang="zh-TW" altLang="en-US" b="1" dirty="0"/>
+              <a:t>保持交易簡短</a:t>
+            </a:r>
+            <a:r>
+              <a:rPr lang="zh-TW" altLang="en-US" dirty="0"/>
+              <a:t>：</a:t>
+            </a:r>
+            <a:endParaRPr lang="en-US" altLang="zh-TW" dirty="0"/>
+          </a:p>
+          <a:p>
+            <a:pPr lvl="1"/>
+            <a:r>
+              <a:rPr lang="zh-TW" altLang="en-US" dirty="0"/>
+              <a:t>盡量讓交易保持簡短，只包含必要的操作。這樣可以提高性能，減少資源佔用。</a:t>
+            </a:r>
+          </a:p>
+          <a:p>
+            <a:endParaRPr lang="zh-TW" altLang="en-US" dirty="0"/>
+          </a:p>
+        </p:txBody>
+      </p:sp>
+      <p:sp>
+        <p:nvSpPr>
+          <p:cNvPr id="3" name="標題 2"/>
+          <p:cNvSpPr>
+            <a:spLocks noGrp="1"/>
+          </p:cNvSpPr>
+          <p:nvPr>
+            <p:ph type="title"/>
+          </p:nvPr>
+        </p:nvSpPr>
+        <p:spPr/>
+        <p:txBody>
+          <a:bodyPr/>
+          <a:lstStyle/>
+          <a:p>
+            <a:r>
+              <a:rPr lang="zh-TW" altLang="en-US" dirty="0" smtClean="0"/>
+              <a:t>交易控制</a:t>
+            </a:r>
+            <a:endParaRPr lang="zh-TW" altLang="en-US" dirty="0"/>
+          </a:p>
+        </p:txBody>
+      </p:sp>
+      <p:sp>
+        <p:nvSpPr>
+          <p:cNvPr id="4" name="投影片編號版面配置區 3"/>
+          <p:cNvSpPr>
+            <a:spLocks noGrp="1"/>
+          </p:cNvSpPr>
+          <p:nvPr>
+            <p:ph type="sldNum" sz="quarter" idx="12"/>
+          </p:nvPr>
+        </p:nvSpPr>
+        <p:spPr/>
+        <p:txBody>
+          <a:bodyPr/>
+          <a:lstStyle/>
+          <a:p>
+            <a:fld id="{5F6CEA59-826A-4FB0-BF3A-D1F923F9F4E7}" type="slidenum">
+              <a:rPr lang="zh-TW" altLang="en-US" smtClean="0"/>
+              <a:t>23</a:t>
+            </a:fld>
+            <a:endParaRPr lang="zh-TW" altLang="en-US"/>
+          </a:p>
+        </p:txBody>
+      </p:sp>
+    </p:spTree>
+    <p:extLst>
+      <p:ext uri="{BB962C8B-B14F-4D97-AF65-F5344CB8AC3E}">
+        <p14:creationId xmlns:p14="http://schemas.microsoft.com/office/powerpoint/2010/main" val="3614658566"/>
+      </p:ext>
+    </p:extLst>
+  </p:cSld>
+  <p:clrMapOvr>
+    <a:masterClrMapping/>
+  </p:clrMapOvr>
+  <mc:AlternateContent xmlns:mc="http://schemas.openxmlformats.org/markup-compatibility/2006" xmlns:p14="http://schemas.microsoft.com/office/powerpoint/2010/main">
+    <mc:Choice Requires="p14">
+      <p:transition spd="med" p14:dur="700">
+        <p:fade/>
+      </p:transition>
+    </mc:Choice>
+    <mc:Fallback xmlns="">
+      <p:transition spd="med">
+        <p:fade/>
+      </p:transition>
+    </mc:Fallback>
+  </mc:AlternateContent>
+  <p:timing>
+    <p:tnLst>
+      <p:par>
+        <p:cTn id="1" dur="indefinite" restart="never" nodeType="tmRoot"/>
+      </p:par>
+    </p:tnLst>
+  </p:timing>
+</p:sld>
+</file>
+
+<file path=ppt/slides/slide24.xml><?xml version="1.0" encoding="utf-8"?>
+<p:sld xmlns:a="http://schemas.openxmlformats.org/drawingml/2006/main" xmlns:r="http://schemas.openxmlformats.org/officeDocument/2006/relationships" xmlns:p="http://schemas.openxmlformats.org/presentationml/2006/main">
+  <p:cSld>
+    <p:spTree>
+      <p:nvGrpSpPr>
+        <p:cNvPr id="1" name=""/>
+        <p:cNvGrpSpPr/>
+        <p:nvPr/>
+      </p:nvGrpSpPr>
+      <p:grpSpPr>
+        <a:xfrm>
+          <a:off x="0" y="0"/>
+          <a:ext cx="0" cy="0"/>
+          <a:chOff x="0" y="0"/>
+          <a:chExt cx="0" cy="0"/>
+        </a:xfrm>
+      </p:grpSpPr>
+      <p:sp>
+        <p:nvSpPr>
+          <p:cNvPr id="2" name="內容版面配置區 1"/>
+          <p:cNvSpPr>
+            <a:spLocks noGrp="1"/>
+          </p:cNvSpPr>
+          <p:nvPr>
+            <p:ph idx="1"/>
+          </p:nvPr>
+        </p:nvSpPr>
+        <p:spPr/>
+        <p:txBody>
+          <a:bodyPr/>
+          <a:lstStyle/>
+          <a:p>
+            <a:r>
+              <a:rPr lang="zh-TW" altLang="en-US" b="1" dirty="0"/>
+              <a:t>隔離級別 </a:t>
+            </a:r>
+            <a:r>
+              <a:rPr lang="en-US" altLang="zh-TW" b="1" dirty="0"/>
+              <a:t>(Isolation)</a:t>
+            </a:r>
+          </a:p>
+          <a:p>
+            <a:pPr lvl="1"/>
+            <a:r>
+              <a:rPr lang="zh-TW" altLang="en-US" dirty="0"/>
+              <a:t>在多使用者同時存取資料庫的環境下，為了避免資料錯亂，資料庫定義了不同的隔離級別來規範一個交易中的操作對其他並行交易的</a:t>
+            </a:r>
+            <a:r>
+              <a:rPr lang="zh-TW" altLang="en-US" dirty="0" smtClean="0"/>
+              <a:t>可見度</a:t>
+            </a:r>
+            <a:endParaRPr lang="en-US" altLang="zh-TW" dirty="0" smtClean="0"/>
+          </a:p>
+          <a:p>
+            <a:pPr lvl="1"/>
+            <a:endParaRPr lang="zh-TW" altLang="en-US" dirty="0"/>
+          </a:p>
+        </p:txBody>
+      </p:sp>
+      <p:sp>
+        <p:nvSpPr>
+          <p:cNvPr id="3" name="標題 2"/>
+          <p:cNvSpPr>
+            <a:spLocks noGrp="1"/>
+          </p:cNvSpPr>
+          <p:nvPr>
+            <p:ph type="title"/>
+          </p:nvPr>
+        </p:nvSpPr>
+        <p:spPr/>
+        <p:txBody>
+          <a:bodyPr/>
+          <a:lstStyle/>
+          <a:p>
+            <a:r>
+              <a:rPr lang="zh-TW" altLang="en-US" dirty="0" smtClean="0"/>
+              <a:t>交易控制</a:t>
+            </a:r>
+            <a:endParaRPr lang="zh-TW" altLang="en-US" dirty="0"/>
+          </a:p>
+        </p:txBody>
+      </p:sp>
+      <p:sp>
+        <p:nvSpPr>
+          <p:cNvPr id="4" name="投影片編號版面配置區 3"/>
+          <p:cNvSpPr>
+            <a:spLocks noGrp="1"/>
+          </p:cNvSpPr>
+          <p:nvPr>
+            <p:ph type="sldNum" sz="quarter" idx="12"/>
+          </p:nvPr>
+        </p:nvSpPr>
+        <p:spPr/>
+        <p:txBody>
+          <a:bodyPr/>
+          <a:lstStyle/>
+          <a:p>
+            <a:fld id="{5F6CEA59-826A-4FB0-BF3A-D1F923F9F4E7}" type="slidenum">
+              <a:rPr lang="zh-TW" altLang="en-US" smtClean="0"/>
+              <a:t>24</a:t>
+            </a:fld>
+            <a:endParaRPr lang="zh-TW" altLang="en-US"/>
+          </a:p>
+        </p:txBody>
+      </p:sp>
+      <p:pic>
+        <p:nvPicPr>
+          <p:cNvPr id="6" name="圖片 5"/>
+          <p:cNvPicPr>
+            <a:picLocks noChangeAspect="1"/>
+          </p:cNvPicPr>
+          <p:nvPr/>
+        </p:nvPicPr>
+        <p:blipFill>
+          <a:blip r:embed="rId3"/>
+          <a:stretch>
+            <a:fillRect/>
+          </a:stretch>
+        </p:blipFill>
+        <p:spPr>
+          <a:xfrm>
+            <a:off x="2647468" y="2720543"/>
+            <a:ext cx="6897063" cy="3315163"/>
+          </a:xfrm>
+          <a:prstGeom prst="rect">
+            <a:avLst/>
+          </a:prstGeom>
+        </p:spPr>
+      </p:pic>
+    </p:spTree>
+    <p:extLst>
+      <p:ext uri="{BB962C8B-B14F-4D97-AF65-F5344CB8AC3E}">
+        <p14:creationId xmlns:p14="http://schemas.microsoft.com/office/powerpoint/2010/main" val="39600418"/>
+      </p:ext>
+    </p:extLst>
+  </p:cSld>
+  <p:clrMapOvr>
+    <a:masterClrMapping/>
+  </p:clrMapOvr>
+  <mc:AlternateContent xmlns:mc="http://schemas.openxmlformats.org/markup-compatibility/2006" xmlns:p14="http://schemas.microsoft.com/office/powerpoint/2010/main">
+    <mc:Choice Requires="p14">
+      <p:transition spd="med" p14:dur="700">
+        <p:fade/>
+      </p:transition>
+    </mc:Choice>
+    <mc:Fallback xmlns="">
+      <p:transition spd="med">
+        <p:fade/>
+      </p:transition>
+    </mc:Fallback>
+  </mc:AlternateContent>
+  <p:timing>
+    <p:tnLst>
+      <p:par>
+        <p:cTn id="1" dur="indefinite" restart="never" nodeType="tmRoot"/>
+      </p:par>
+    </p:tnLst>
+  </p:timing>
+</p:sld>
+</file>
+
+<file path=ppt/slides/slide25.xml><?xml version="1.0" encoding="utf-8"?>
+<p:sld xmlns:a="http://schemas.openxmlformats.org/drawingml/2006/main" xmlns:r="http://schemas.openxmlformats.org/officeDocument/2006/relationships" xmlns:p="http://schemas.openxmlformats.org/presentationml/2006/main">
+  <p:cSld>
+    <p:spTree>
+      <p:nvGrpSpPr>
+        <p:cNvPr id="1" name=""/>
+        <p:cNvGrpSpPr/>
+        <p:nvPr/>
+      </p:nvGrpSpPr>
+      <p:grpSpPr>
+        <a:xfrm>
+          <a:off x="0" y="0"/>
+          <a:ext cx="0" cy="0"/>
+          <a:chOff x="0" y="0"/>
+          <a:chExt cx="0" cy="0"/>
+        </a:xfrm>
+      </p:grpSpPr>
+      <p:sp>
+        <p:nvSpPr>
+          <p:cNvPr id="2" name="內容版面配置區 1"/>
+          <p:cNvSpPr>
+            <a:spLocks noGrp="1"/>
+          </p:cNvSpPr>
+          <p:nvPr>
+            <p:ph idx="1"/>
+          </p:nvPr>
+        </p:nvSpPr>
+        <p:spPr/>
+        <p:txBody>
+          <a:bodyPr/>
+          <a:lstStyle/>
+          <a:p>
+            <a:r>
+              <a:rPr lang="en-US" altLang="zh-TW" dirty="0" smtClean="0"/>
+              <a:t>Ref</a:t>
+            </a:r>
+            <a:r>
+              <a:rPr lang="zh-TW" altLang="en-US" dirty="0" smtClean="0"/>
+              <a:t>：</a:t>
+            </a:r>
+            <a:endParaRPr lang="en-US" altLang="zh-TW" dirty="0" smtClean="0"/>
+          </a:p>
+          <a:p>
+            <a:pPr lvl="1"/>
+            <a:r>
+              <a:rPr lang="en-US" altLang="zh-TW" dirty="0">
+                <a:hlinkClick r:id="rId3"/>
+              </a:rPr>
+              <a:t>https://</a:t>
+            </a:r>
+            <a:r>
+              <a:rPr lang="en-US" altLang="zh-TW" dirty="0" smtClean="0">
+                <a:hlinkClick r:id="rId3"/>
+              </a:rPr>
+              <a:t>ithelp.ithome.com.tw/articles/10378934</a:t>
+            </a:r>
+            <a:endParaRPr lang="en-US" altLang="zh-TW" dirty="0" smtClean="0"/>
+          </a:p>
+          <a:p>
+            <a:pPr lvl="1"/>
+            <a:r>
+              <a:rPr lang="en-US" altLang="zh-TW" dirty="0">
+                <a:hlinkClick r:id="rId4"/>
+              </a:rPr>
+              <a:t>https://</a:t>
+            </a:r>
+            <a:r>
+              <a:rPr lang="en-US" altLang="zh-TW" dirty="0" smtClean="0">
+                <a:hlinkClick r:id="rId4"/>
+              </a:rPr>
+              <a:t>blog.cashwu.com/blog/2024/spring-boot-transactional-usage-and-best-practices</a:t>
+            </a:r>
+            <a:endParaRPr lang="en-US" altLang="zh-TW" dirty="0" smtClean="0"/>
+          </a:p>
+          <a:p>
+            <a:pPr lvl="1"/>
+            <a:endParaRPr lang="en-US" altLang="zh-TW" dirty="0" smtClean="0"/>
+          </a:p>
+          <a:p>
+            <a:pPr lvl="1"/>
+            <a:endParaRPr lang="zh-TW" altLang="en-US" dirty="0"/>
+          </a:p>
+        </p:txBody>
+      </p:sp>
+      <p:sp>
+        <p:nvSpPr>
+          <p:cNvPr id="3" name="標題 2"/>
+          <p:cNvSpPr>
+            <a:spLocks noGrp="1"/>
+          </p:cNvSpPr>
+          <p:nvPr>
+            <p:ph type="title"/>
+          </p:nvPr>
+        </p:nvSpPr>
+        <p:spPr/>
+        <p:txBody>
+          <a:bodyPr/>
+          <a:lstStyle/>
+          <a:p>
+            <a:r>
+              <a:rPr lang="zh-TW" altLang="en-US" dirty="0" smtClean="0"/>
+              <a:t>交易控制</a:t>
+            </a:r>
+            <a:endParaRPr lang="zh-TW" altLang="en-US" dirty="0"/>
+          </a:p>
+        </p:txBody>
+      </p:sp>
+      <p:sp>
+        <p:nvSpPr>
+          <p:cNvPr id="4" name="投影片編號版面配置區 3"/>
+          <p:cNvSpPr>
+            <a:spLocks noGrp="1"/>
+          </p:cNvSpPr>
+          <p:nvPr>
+            <p:ph type="sldNum" sz="quarter" idx="12"/>
+          </p:nvPr>
+        </p:nvSpPr>
+        <p:spPr/>
+        <p:txBody>
+          <a:bodyPr/>
+          <a:lstStyle/>
+          <a:p>
+            <a:fld id="{5F6CEA59-826A-4FB0-BF3A-D1F923F9F4E7}" type="slidenum">
+              <a:rPr lang="zh-TW" altLang="en-US" smtClean="0"/>
+              <a:t>25</a:t>
+            </a:fld>
+            <a:endParaRPr lang="zh-TW" altLang="en-US"/>
+          </a:p>
+        </p:txBody>
+      </p:sp>
+    </p:spTree>
+    <p:extLst>
+      <p:ext uri="{BB962C8B-B14F-4D97-AF65-F5344CB8AC3E}">
+        <p14:creationId xmlns:p14="http://schemas.microsoft.com/office/powerpoint/2010/main" val="2491642291"/>
+      </p:ext>
+    </p:extLst>
+  </p:cSld>
+  <p:clrMapOvr>
+    <a:masterClrMapping/>
+  </p:clrMapOvr>
+  <mc:AlternateContent xmlns:mc="http://schemas.openxmlformats.org/markup-compatibility/2006" xmlns:p14="http://schemas.microsoft.com/office/powerpoint/2010/main">
+    <mc:Choice Requires="p14">
+      <p:transition spd="med" p14:dur="700">
+        <p:fade/>
+      </p:transition>
+    </mc:Choice>
+    <mc:Fallback xmlns="">
+      <p:transition spd="med">
+        <p:fade/>
+      </p:transition>
+    </mc:Fallback>
+  </mc:AlternateContent>
+  <p:timing>
+    <p:tnLst>
+      <p:par>
+        <p:cTn id="1" dur="indefinite" restart="never" nodeType="tmRoot"/>
+      </p:par>
+    </p:tnLst>
+  </p:timing>
+</p:sld>
+</file>
+
+<file path=ppt/slides/slide26.xml><?xml version="1.0" encoding="utf-8"?>
 <p:sld xmlns:a="http://schemas.openxmlformats.org/drawingml/2006/main" xmlns:r="http://schemas.openxmlformats.org/officeDocument/2006/relationships" xmlns:p="http://schemas.openxmlformats.org/presentationml/2006/main">
   <p:cSld>
     <p:spTree>
@@ -7923,88 +11340,13 @@
       </p:transition>
     </mc:Fallback>
   </mc:AlternateContent>
-</p:sld>
-</file>
-
-<file path=ppt/slides/slide2.xml><?xml version="1.0" encoding="utf-8"?>
-<p:sld xmlns:a="http://schemas.openxmlformats.org/drawingml/2006/main" xmlns:r="http://schemas.openxmlformats.org/officeDocument/2006/relationships" xmlns:p="http://schemas.openxmlformats.org/presentationml/2006/main">
-  <p:cSld>
-    <p:spTree>
-      <p:nvGrpSpPr>
-        <p:cNvPr id="1" name=""/>
-        <p:cNvGrpSpPr/>
-        <p:nvPr/>
-      </p:nvGrpSpPr>
-      <p:grpSpPr>
-        <a:xfrm>
-          <a:off x="0" y="0"/>
-          <a:ext cx="0" cy="0"/>
-          <a:chOff x="0" y="0"/>
-          <a:chExt cx="0" cy="0"/>
-        </a:xfrm>
-      </p:grpSpPr>
-      <p:sp>
-        <p:nvSpPr>
-          <p:cNvPr id="2" name="文字版面配置區 1"/>
-          <p:cNvSpPr>
-            <a:spLocks noGrp="1"/>
-          </p:cNvSpPr>
-          <p:nvPr>
-            <p:ph type="body" idx="1"/>
-          </p:nvPr>
-        </p:nvSpPr>
-        <p:spPr/>
-        <p:txBody>
-          <a:bodyPr>
-            <a:normAutofit lnSpcReduction="10000"/>
-          </a:bodyPr>
-          <a:lstStyle/>
-          <a:p>
-            <a:endParaRPr lang="zh-TW" altLang="en-US" dirty="0"/>
-          </a:p>
-        </p:txBody>
-      </p:sp>
-      <p:sp>
-        <p:nvSpPr>
-          <p:cNvPr id="3" name="標題 2"/>
-          <p:cNvSpPr>
-            <a:spLocks noGrp="1"/>
-          </p:cNvSpPr>
-          <p:nvPr>
-            <p:ph type="title"/>
-          </p:nvPr>
-        </p:nvSpPr>
-        <p:spPr/>
-        <p:txBody>
-          <a:bodyPr>
-            <a:normAutofit fontScale="90000"/>
-          </a:bodyPr>
-          <a:lstStyle/>
-          <a:p>
-            <a:r>
-              <a:rPr lang="zh-TW" altLang="en-US" dirty="0"/>
-              <a:t>例外處理</a:t>
-            </a:r>
-          </a:p>
-        </p:txBody>
-      </p:sp>
-    </p:spTree>
-  </p:cSld>
-  <p:clrMapOvr>
-    <a:masterClrMapping/>
-  </p:clrMapOvr>
-  <mc:AlternateContent xmlns:mc="http://schemas.openxmlformats.org/markup-compatibility/2006" xmlns:p14="http://schemas.microsoft.com/office/powerpoint/2010/main">
-    <mc:Choice Requires="p14">
-      <p:transition spd="med" p14:dur="700">
-        <p:fade/>
-      </p:transition>
-    </mc:Choice>
-    <mc:Fallback xmlns="">
-      <p:transition spd="med">
-        <p:fade/>
-      </p:transition>
-    </mc:Fallback>
-  </mc:AlternateContent>
+  <p:timing>
+    <p:tnLst>
+      <p:par>
+        <p:cTn id="1" dur="indefinite" restart="never" nodeType="tmRoot"/>
+      </p:par>
+    </p:tnLst>
+  </p:timing>
 </p:sld>
 </file>
 
@@ -10286,4 +13628,90 @@
     </a:ext>
   </a:extLst>
 </a:theme>
+</file>
+
+<file path=ppt/theme/themeOverride1.xml><?xml version="1.0" encoding="utf-8"?>
+<a:themeOverride xmlns:a="http://schemas.openxmlformats.org/drawingml/2006/main">
+  <a:clrScheme name="Office">
+    <a:dk1>
+      <a:sysClr val="windowText" lastClr="000000"/>
+    </a:dk1>
+    <a:lt1>
+      <a:sysClr val="window" lastClr="FFFFFF"/>
+    </a:lt1>
+    <a:dk2>
+      <a:srgbClr val="44546A"/>
+    </a:dk2>
+    <a:lt2>
+      <a:srgbClr val="E7E6E6"/>
+    </a:lt2>
+    <a:accent1>
+      <a:srgbClr val="5B9BD5"/>
+    </a:accent1>
+    <a:accent2>
+      <a:srgbClr val="ED7D31"/>
+    </a:accent2>
+    <a:accent3>
+      <a:srgbClr val="A5A5A5"/>
+    </a:accent3>
+    <a:accent4>
+      <a:srgbClr val="FFC000"/>
+    </a:accent4>
+    <a:accent5>
+      <a:srgbClr val="4472C4"/>
+    </a:accent5>
+    <a:accent6>
+      <a:srgbClr val="70AD47"/>
+    </a:accent6>
+    <a:hlink>
+      <a:srgbClr val="0563C1"/>
+    </a:hlink>
+    <a:folHlink>
+      <a:srgbClr val="954F72"/>
+    </a:folHlink>
+  </a:clrScheme>
+</a:themeOverride>
+</file>
+
+<file path=ppt/theme/themeOverride2.xml><?xml version="1.0" encoding="utf-8"?>
+<a:themeOverride xmlns:a="http://schemas.openxmlformats.org/drawingml/2006/main">
+  <a:clrScheme name="Office">
+    <a:dk1>
+      <a:sysClr val="windowText" lastClr="000000"/>
+    </a:dk1>
+    <a:lt1>
+      <a:sysClr val="window" lastClr="FFFFFF"/>
+    </a:lt1>
+    <a:dk2>
+      <a:srgbClr val="44546A"/>
+    </a:dk2>
+    <a:lt2>
+      <a:srgbClr val="E7E6E6"/>
+    </a:lt2>
+    <a:accent1>
+      <a:srgbClr val="5B9BD5"/>
+    </a:accent1>
+    <a:accent2>
+      <a:srgbClr val="ED7D31"/>
+    </a:accent2>
+    <a:accent3>
+      <a:srgbClr val="A5A5A5"/>
+    </a:accent3>
+    <a:accent4>
+      <a:srgbClr val="FFC000"/>
+    </a:accent4>
+    <a:accent5>
+      <a:srgbClr val="4472C4"/>
+    </a:accent5>
+    <a:accent6>
+      <a:srgbClr val="70AD47"/>
+    </a:accent6>
+    <a:hlink>
+      <a:srgbClr val="0563C1"/>
+    </a:hlink>
+    <a:folHlink>
+      <a:srgbClr val="954F72"/>
+    </a:folHlink>
+  </a:clrScheme>
+</a:themeOverride>
 </file>